--- a/statistics_03_linear_regression.pptx
+++ b/statistics_03_linear_regression.pptx
@@ -5,15 +5,14 @@
     <p:sldMasterId id="2147483659" r:id="rId1"/>
   </p:sldMasterIdLst>
   <p:notesMasterIdLst>
-    <p:notesMasterId r:id="rId8"/>
+    <p:notesMasterId r:id="rId7"/>
   </p:notesMasterIdLst>
   <p:sldIdLst>
-    <p:sldId id="269" r:id="rId2"/>
-    <p:sldId id="285" r:id="rId3"/>
-    <p:sldId id="270" r:id="rId4"/>
-    <p:sldId id="300" r:id="rId5"/>
-    <p:sldId id="288" r:id="rId6"/>
-    <p:sldId id="301" r:id="rId7"/>
+    <p:sldId id="285" r:id="rId2"/>
+    <p:sldId id="270" r:id="rId3"/>
+    <p:sldId id="300" r:id="rId4"/>
+    <p:sldId id="288" r:id="rId5"/>
+    <p:sldId id="301" r:id="rId6"/>
   </p:sldIdLst>
   <p:sldSz cx="12192000" cy="6858000"/>
   <p:notesSz cx="6858000" cy="9144000"/>
@@ -1529,7 +1528,7 @@
                 <a:cs typeface="Calibri"/>
                 <a:sym typeface="Calibri"/>
               </a:rPr>
-              <a:t>2</a:t>
+              <a:t>1</a:t>
             </a:fld>
             <a:endParaRPr lang="en-US" sz="1200" b="0" i="0" u="none" strike="noStrike" cap="none">
               <a:solidFill>
@@ -2590,1039 +2589,6 @@
 </file>
 
 <file path=ppt/slideLayouts/slideLayout2.xml><?xml version="1.0" encoding="utf-8"?>
-<p:sldLayout xmlns:a="http://schemas.openxmlformats.org/drawingml/2006/main" xmlns:r="http://schemas.openxmlformats.org/officeDocument/2006/relationships" xmlns:p="http://schemas.openxmlformats.org/presentationml/2006/main" matchingName="Section Header" type="secHead">
-  <p:cSld name="SECTION_HEADER">
-    <p:spTree>
-      <p:nvGrpSpPr>
-        <p:cNvPr id="1" name="Shape 34"/>
-        <p:cNvGrpSpPr/>
-        <p:nvPr/>
-      </p:nvGrpSpPr>
-      <p:grpSpPr>
-        <a:xfrm>
-          <a:off x="0" y="0"/>
-          <a:ext cx="0" cy="0"/>
-          <a:chOff x="0" y="0"/>
-          <a:chExt cx="0" cy="0"/>
-        </a:xfrm>
-      </p:grpSpPr>
-      <p:sp>
-        <p:nvSpPr>
-          <p:cNvPr id="35" name="Google Shape;35;p5"/>
-          <p:cNvSpPr txBox="1">
-            <a:spLocks noGrp="1"/>
-          </p:cNvSpPr>
-          <p:nvPr>
-            <p:ph type="title"/>
-          </p:nvPr>
-        </p:nvSpPr>
-        <p:spPr>
-          <a:xfrm>
-            <a:off x="831850" y="1709738"/>
-            <a:ext cx="10515600" cy="2852737"/>
-          </a:xfrm>
-          <a:prstGeom prst="rect">
-            <a:avLst/>
-          </a:prstGeom>
-          <a:noFill/>
-          <a:ln>
-            <a:noFill/>
-          </a:ln>
-        </p:spPr>
-        <p:txBody>
-          <a:bodyPr spcFirstLastPara="1" wrap="square" lIns="91425" tIns="91425" rIns="91425" bIns="91425" anchor="b" anchorCtr="0">
-            <a:noAutofit/>
-          </a:bodyPr>
-          <a:lstStyle>
-            <a:lvl1pPr marR="0" lvl="0" algn="l" rtl="0">
-              <a:lnSpc>
-                <a:spcPct val="90000"/>
-              </a:lnSpc>
-              <a:spcBef>
-                <a:spcPts val="0"/>
-              </a:spcBef>
-              <a:spcAft>
-                <a:spcPts val="0"/>
-              </a:spcAft>
-              <a:buClr>
-                <a:schemeClr val="dk1"/>
-              </a:buClr>
-              <a:buSzPts val="6000"/>
-              <a:buFont typeface="Calibri"/>
-              <a:buNone/>
-              <a:defRPr sz="6000" b="0" i="0" u="none" strike="noStrike" cap="none">
-                <a:solidFill>
-                  <a:schemeClr val="dk1"/>
-                </a:solidFill>
-                <a:latin typeface="Calibri"/>
-                <a:ea typeface="Calibri"/>
-                <a:cs typeface="Calibri"/>
-                <a:sym typeface="Calibri"/>
-              </a:defRPr>
-            </a:lvl1pPr>
-            <a:lvl2pPr lvl="1">
-              <a:spcBef>
-                <a:spcPts val="0"/>
-              </a:spcBef>
-              <a:spcAft>
-                <a:spcPts val="0"/>
-              </a:spcAft>
-              <a:buSzPts val="1400"/>
-              <a:buNone/>
-              <a:defRPr sz="1800"/>
-            </a:lvl2pPr>
-            <a:lvl3pPr lvl="2">
-              <a:spcBef>
-                <a:spcPts val="0"/>
-              </a:spcBef>
-              <a:spcAft>
-                <a:spcPts val="0"/>
-              </a:spcAft>
-              <a:buSzPts val="1400"/>
-              <a:buNone/>
-              <a:defRPr sz="1800"/>
-            </a:lvl3pPr>
-            <a:lvl4pPr lvl="3">
-              <a:spcBef>
-                <a:spcPts val="0"/>
-              </a:spcBef>
-              <a:spcAft>
-                <a:spcPts val="0"/>
-              </a:spcAft>
-              <a:buSzPts val="1400"/>
-              <a:buNone/>
-              <a:defRPr sz="1800"/>
-            </a:lvl4pPr>
-            <a:lvl5pPr lvl="4">
-              <a:spcBef>
-                <a:spcPts val="0"/>
-              </a:spcBef>
-              <a:spcAft>
-                <a:spcPts val="0"/>
-              </a:spcAft>
-              <a:buSzPts val="1400"/>
-              <a:buNone/>
-              <a:defRPr sz="1800"/>
-            </a:lvl5pPr>
-            <a:lvl6pPr lvl="5">
-              <a:spcBef>
-                <a:spcPts val="0"/>
-              </a:spcBef>
-              <a:spcAft>
-                <a:spcPts val="0"/>
-              </a:spcAft>
-              <a:buSzPts val="1400"/>
-              <a:buNone/>
-              <a:defRPr sz="1800"/>
-            </a:lvl6pPr>
-            <a:lvl7pPr lvl="6">
-              <a:spcBef>
-                <a:spcPts val="0"/>
-              </a:spcBef>
-              <a:spcAft>
-                <a:spcPts val="0"/>
-              </a:spcAft>
-              <a:buSzPts val="1400"/>
-              <a:buNone/>
-              <a:defRPr sz="1800"/>
-            </a:lvl7pPr>
-            <a:lvl8pPr lvl="7">
-              <a:spcBef>
-                <a:spcPts val="0"/>
-              </a:spcBef>
-              <a:spcAft>
-                <a:spcPts val="0"/>
-              </a:spcAft>
-              <a:buSzPts val="1400"/>
-              <a:buNone/>
-              <a:defRPr sz="1800"/>
-            </a:lvl8pPr>
-            <a:lvl9pPr lvl="8">
-              <a:spcBef>
-                <a:spcPts val="0"/>
-              </a:spcBef>
-              <a:spcAft>
-                <a:spcPts val="0"/>
-              </a:spcAft>
-              <a:buSzPts val="1400"/>
-              <a:buNone/>
-              <a:defRPr sz="1800"/>
-            </a:lvl9pPr>
-          </a:lstStyle>
-          <a:p>
-            <a:endParaRPr/>
-          </a:p>
-        </p:txBody>
-      </p:sp>
-      <p:sp>
-        <p:nvSpPr>
-          <p:cNvPr id="36" name="Google Shape;36;p5"/>
-          <p:cNvSpPr txBox="1">
-            <a:spLocks noGrp="1"/>
-          </p:cNvSpPr>
-          <p:nvPr>
-            <p:ph type="body" idx="1"/>
-          </p:nvPr>
-        </p:nvSpPr>
-        <p:spPr>
-          <a:xfrm>
-            <a:off x="831850" y="4589463"/>
-            <a:ext cx="10515600" cy="1500187"/>
-          </a:xfrm>
-          <a:prstGeom prst="rect">
-            <a:avLst/>
-          </a:prstGeom>
-          <a:noFill/>
-          <a:ln>
-            <a:noFill/>
-          </a:ln>
-        </p:spPr>
-        <p:txBody>
-          <a:bodyPr spcFirstLastPara="1" wrap="square" lIns="91425" tIns="91425" rIns="91425" bIns="91425" anchor="t" anchorCtr="0">
-            <a:noAutofit/>
-          </a:bodyPr>
-          <a:lstStyle>
-            <a:lvl1pPr marL="457200" marR="0" lvl="0" indent="-228600" algn="l" rtl="0">
-              <a:lnSpc>
-                <a:spcPct val="90000"/>
-              </a:lnSpc>
-              <a:spcBef>
-                <a:spcPts val="1000"/>
-              </a:spcBef>
-              <a:spcAft>
-                <a:spcPts val="0"/>
-              </a:spcAft>
-              <a:buClr>
-                <a:srgbClr val="888888"/>
-              </a:buClr>
-              <a:buSzPts val="2400"/>
-              <a:buFont typeface="Arial"/>
-              <a:buNone/>
-              <a:defRPr sz="2400" b="0" i="0" u="none" strike="noStrike" cap="none">
-                <a:solidFill>
-                  <a:srgbClr val="888888"/>
-                </a:solidFill>
-                <a:latin typeface="Calibri"/>
-                <a:ea typeface="Calibri"/>
-                <a:cs typeface="Calibri"/>
-                <a:sym typeface="Calibri"/>
-              </a:defRPr>
-            </a:lvl1pPr>
-            <a:lvl2pPr marL="914400" marR="0" lvl="1" indent="-228600" algn="l" rtl="0">
-              <a:lnSpc>
-                <a:spcPct val="90000"/>
-              </a:lnSpc>
-              <a:spcBef>
-                <a:spcPts val="500"/>
-              </a:spcBef>
-              <a:spcAft>
-                <a:spcPts val="0"/>
-              </a:spcAft>
-              <a:buClr>
-                <a:srgbClr val="888888"/>
-              </a:buClr>
-              <a:buSzPts val="2000"/>
-              <a:buFont typeface="Arial"/>
-              <a:buNone/>
-              <a:defRPr sz="2000" b="0" i="0" u="none" strike="noStrike" cap="none">
-                <a:solidFill>
-                  <a:srgbClr val="888888"/>
-                </a:solidFill>
-                <a:latin typeface="Calibri"/>
-                <a:ea typeface="Calibri"/>
-                <a:cs typeface="Calibri"/>
-                <a:sym typeface="Calibri"/>
-              </a:defRPr>
-            </a:lvl2pPr>
-            <a:lvl3pPr marL="1371600" marR="0" lvl="2" indent="-228600" algn="l" rtl="0">
-              <a:lnSpc>
-                <a:spcPct val="90000"/>
-              </a:lnSpc>
-              <a:spcBef>
-                <a:spcPts val="500"/>
-              </a:spcBef>
-              <a:spcAft>
-                <a:spcPts val="0"/>
-              </a:spcAft>
-              <a:buClr>
-                <a:srgbClr val="888888"/>
-              </a:buClr>
-              <a:buSzPts val="1800"/>
-              <a:buFont typeface="Arial"/>
-              <a:buNone/>
-              <a:defRPr sz="1800" b="0" i="0" u="none" strike="noStrike" cap="none">
-                <a:solidFill>
-                  <a:srgbClr val="888888"/>
-                </a:solidFill>
-                <a:latin typeface="Calibri"/>
-                <a:ea typeface="Calibri"/>
-                <a:cs typeface="Calibri"/>
-                <a:sym typeface="Calibri"/>
-              </a:defRPr>
-            </a:lvl3pPr>
-            <a:lvl4pPr marL="1828800" marR="0" lvl="3" indent="-228600" algn="l" rtl="0">
-              <a:lnSpc>
-                <a:spcPct val="90000"/>
-              </a:lnSpc>
-              <a:spcBef>
-                <a:spcPts val="500"/>
-              </a:spcBef>
-              <a:spcAft>
-                <a:spcPts val="0"/>
-              </a:spcAft>
-              <a:buClr>
-                <a:srgbClr val="888888"/>
-              </a:buClr>
-              <a:buSzPts val="1600"/>
-              <a:buFont typeface="Arial"/>
-              <a:buNone/>
-              <a:defRPr sz="1600" b="0" i="0" u="none" strike="noStrike" cap="none">
-                <a:solidFill>
-                  <a:srgbClr val="888888"/>
-                </a:solidFill>
-                <a:latin typeface="Calibri"/>
-                <a:ea typeface="Calibri"/>
-                <a:cs typeface="Calibri"/>
-                <a:sym typeface="Calibri"/>
-              </a:defRPr>
-            </a:lvl4pPr>
-            <a:lvl5pPr marL="2286000" marR="0" lvl="4" indent="-228600" algn="l" rtl="0">
-              <a:lnSpc>
-                <a:spcPct val="90000"/>
-              </a:lnSpc>
-              <a:spcBef>
-                <a:spcPts val="500"/>
-              </a:spcBef>
-              <a:spcAft>
-                <a:spcPts val="0"/>
-              </a:spcAft>
-              <a:buClr>
-                <a:srgbClr val="888888"/>
-              </a:buClr>
-              <a:buSzPts val="1600"/>
-              <a:buFont typeface="Arial"/>
-              <a:buNone/>
-              <a:defRPr sz="1600" b="0" i="0" u="none" strike="noStrike" cap="none">
-                <a:solidFill>
-                  <a:srgbClr val="888888"/>
-                </a:solidFill>
-                <a:latin typeface="Calibri"/>
-                <a:ea typeface="Calibri"/>
-                <a:cs typeface="Calibri"/>
-                <a:sym typeface="Calibri"/>
-              </a:defRPr>
-            </a:lvl5pPr>
-            <a:lvl6pPr marL="2743200" marR="0" lvl="5" indent="-228600" algn="l" rtl="0">
-              <a:lnSpc>
-                <a:spcPct val="90000"/>
-              </a:lnSpc>
-              <a:spcBef>
-                <a:spcPts val="500"/>
-              </a:spcBef>
-              <a:spcAft>
-                <a:spcPts val="0"/>
-              </a:spcAft>
-              <a:buClr>
-                <a:srgbClr val="888888"/>
-              </a:buClr>
-              <a:buSzPts val="1600"/>
-              <a:buFont typeface="Arial"/>
-              <a:buNone/>
-              <a:defRPr sz="1600" b="0" i="0" u="none" strike="noStrike" cap="none">
-                <a:solidFill>
-                  <a:srgbClr val="888888"/>
-                </a:solidFill>
-                <a:latin typeface="Calibri"/>
-                <a:ea typeface="Calibri"/>
-                <a:cs typeface="Calibri"/>
-                <a:sym typeface="Calibri"/>
-              </a:defRPr>
-            </a:lvl6pPr>
-            <a:lvl7pPr marL="3200400" marR="0" lvl="6" indent="-228600" algn="l" rtl="0">
-              <a:lnSpc>
-                <a:spcPct val="90000"/>
-              </a:lnSpc>
-              <a:spcBef>
-                <a:spcPts val="500"/>
-              </a:spcBef>
-              <a:spcAft>
-                <a:spcPts val="0"/>
-              </a:spcAft>
-              <a:buClr>
-                <a:srgbClr val="888888"/>
-              </a:buClr>
-              <a:buSzPts val="1600"/>
-              <a:buFont typeface="Arial"/>
-              <a:buNone/>
-              <a:defRPr sz="1600" b="0" i="0" u="none" strike="noStrike" cap="none">
-                <a:solidFill>
-                  <a:srgbClr val="888888"/>
-                </a:solidFill>
-                <a:latin typeface="Calibri"/>
-                <a:ea typeface="Calibri"/>
-                <a:cs typeface="Calibri"/>
-                <a:sym typeface="Calibri"/>
-              </a:defRPr>
-            </a:lvl7pPr>
-            <a:lvl8pPr marL="3657600" marR="0" lvl="7" indent="-228600" algn="l" rtl="0">
-              <a:lnSpc>
-                <a:spcPct val="90000"/>
-              </a:lnSpc>
-              <a:spcBef>
-                <a:spcPts val="500"/>
-              </a:spcBef>
-              <a:spcAft>
-                <a:spcPts val="0"/>
-              </a:spcAft>
-              <a:buClr>
-                <a:srgbClr val="888888"/>
-              </a:buClr>
-              <a:buSzPts val="1600"/>
-              <a:buFont typeface="Arial"/>
-              <a:buNone/>
-              <a:defRPr sz="1600" b="0" i="0" u="none" strike="noStrike" cap="none">
-                <a:solidFill>
-                  <a:srgbClr val="888888"/>
-                </a:solidFill>
-                <a:latin typeface="Calibri"/>
-                <a:ea typeface="Calibri"/>
-                <a:cs typeface="Calibri"/>
-                <a:sym typeface="Calibri"/>
-              </a:defRPr>
-            </a:lvl8pPr>
-            <a:lvl9pPr marL="4114800" marR="0" lvl="8" indent="-228600" algn="l" rtl="0">
-              <a:lnSpc>
-                <a:spcPct val="90000"/>
-              </a:lnSpc>
-              <a:spcBef>
-                <a:spcPts val="500"/>
-              </a:spcBef>
-              <a:spcAft>
-                <a:spcPts val="0"/>
-              </a:spcAft>
-              <a:buClr>
-                <a:srgbClr val="888888"/>
-              </a:buClr>
-              <a:buSzPts val="1600"/>
-              <a:buFont typeface="Arial"/>
-              <a:buNone/>
-              <a:defRPr sz="1600" b="0" i="0" u="none" strike="noStrike" cap="none">
-                <a:solidFill>
-                  <a:srgbClr val="888888"/>
-                </a:solidFill>
-                <a:latin typeface="Calibri"/>
-                <a:ea typeface="Calibri"/>
-                <a:cs typeface="Calibri"/>
-                <a:sym typeface="Calibri"/>
-              </a:defRPr>
-            </a:lvl9pPr>
-          </a:lstStyle>
-          <a:p>
-            <a:endParaRPr/>
-          </a:p>
-        </p:txBody>
-      </p:sp>
-      <p:sp>
-        <p:nvSpPr>
-          <p:cNvPr id="37" name="Google Shape;37;p5"/>
-          <p:cNvSpPr txBox="1">
-            <a:spLocks noGrp="1"/>
-          </p:cNvSpPr>
-          <p:nvPr>
-            <p:ph type="dt" idx="10"/>
-          </p:nvPr>
-        </p:nvSpPr>
-        <p:spPr>
-          <a:xfrm>
-            <a:off x="838200" y="6356350"/>
-            <a:ext cx="2743200" cy="365125"/>
-          </a:xfrm>
-          <a:prstGeom prst="rect">
-            <a:avLst/>
-          </a:prstGeom>
-          <a:noFill/>
-          <a:ln>
-            <a:noFill/>
-          </a:ln>
-        </p:spPr>
-        <p:txBody>
-          <a:bodyPr spcFirstLastPara="1" wrap="square" lIns="91425" tIns="91425" rIns="91425" bIns="91425" anchor="ctr" anchorCtr="0">
-            <a:noAutofit/>
-          </a:bodyPr>
-          <a:lstStyle>
-            <a:lvl1pPr marR="0" lvl="0" algn="l" rtl="0">
-              <a:spcBef>
-                <a:spcPts val="0"/>
-              </a:spcBef>
-              <a:spcAft>
-                <a:spcPts val="0"/>
-              </a:spcAft>
-              <a:buSzPts val="1400"/>
-              <a:buNone/>
-              <a:defRPr sz="1200">
-                <a:solidFill>
-                  <a:srgbClr val="888888"/>
-                </a:solidFill>
-                <a:latin typeface="Calibri"/>
-                <a:ea typeface="Calibri"/>
-                <a:cs typeface="Calibri"/>
-                <a:sym typeface="Calibri"/>
-              </a:defRPr>
-            </a:lvl1pPr>
-            <a:lvl2pPr marR="0" lvl="1" algn="l" rtl="0">
-              <a:spcBef>
-                <a:spcPts val="0"/>
-              </a:spcBef>
-              <a:spcAft>
-                <a:spcPts val="0"/>
-              </a:spcAft>
-              <a:buSzPts val="1400"/>
-              <a:buNone/>
-              <a:defRPr sz="1800" b="0" i="0" u="none" strike="noStrike" cap="none">
-                <a:solidFill>
-                  <a:schemeClr val="dk1"/>
-                </a:solidFill>
-                <a:latin typeface="Calibri"/>
-                <a:ea typeface="Calibri"/>
-                <a:cs typeface="Calibri"/>
-                <a:sym typeface="Calibri"/>
-              </a:defRPr>
-            </a:lvl2pPr>
-            <a:lvl3pPr marR="0" lvl="2" algn="l" rtl="0">
-              <a:spcBef>
-                <a:spcPts val="0"/>
-              </a:spcBef>
-              <a:spcAft>
-                <a:spcPts val="0"/>
-              </a:spcAft>
-              <a:buSzPts val="1400"/>
-              <a:buNone/>
-              <a:defRPr sz="1800" b="0" i="0" u="none" strike="noStrike" cap="none">
-                <a:solidFill>
-                  <a:schemeClr val="dk1"/>
-                </a:solidFill>
-                <a:latin typeface="Calibri"/>
-                <a:ea typeface="Calibri"/>
-                <a:cs typeface="Calibri"/>
-                <a:sym typeface="Calibri"/>
-              </a:defRPr>
-            </a:lvl3pPr>
-            <a:lvl4pPr marR="0" lvl="3" algn="l" rtl="0">
-              <a:spcBef>
-                <a:spcPts val="0"/>
-              </a:spcBef>
-              <a:spcAft>
-                <a:spcPts val="0"/>
-              </a:spcAft>
-              <a:buSzPts val="1400"/>
-              <a:buNone/>
-              <a:defRPr sz="1800" b="0" i="0" u="none" strike="noStrike" cap="none">
-                <a:solidFill>
-                  <a:schemeClr val="dk1"/>
-                </a:solidFill>
-                <a:latin typeface="Calibri"/>
-                <a:ea typeface="Calibri"/>
-                <a:cs typeface="Calibri"/>
-                <a:sym typeface="Calibri"/>
-              </a:defRPr>
-            </a:lvl4pPr>
-            <a:lvl5pPr marR="0" lvl="4" algn="l" rtl="0">
-              <a:spcBef>
-                <a:spcPts val="0"/>
-              </a:spcBef>
-              <a:spcAft>
-                <a:spcPts val="0"/>
-              </a:spcAft>
-              <a:buSzPts val="1400"/>
-              <a:buNone/>
-              <a:defRPr sz="1800" b="0" i="0" u="none" strike="noStrike" cap="none">
-                <a:solidFill>
-                  <a:schemeClr val="dk1"/>
-                </a:solidFill>
-                <a:latin typeface="Calibri"/>
-                <a:ea typeface="Calibri"/>
-                <a:cs typeface="Calibri"/>
-                <a:sym typeface="Calibri"/>
-              </a:defRPr>
-            </a:lvl5pPr>
-            <a:lvl6pPr marR="0" lvl="5" algn="l" rtl="0">
-              <a:spcBef>
-                <a:spcPts val="0"/>
-              </a:spcBef>
-              <a:spcAft>
-                <a:spcPts val="0"/>
-              </a:spcAft>
-              <a:buSzPts val="1400"/>
-              <a:buNone/>
-              <a:defRPr sz="1800" b="0" i="0" u="none" strike="noStrike" cap="none">
-                <a:solidFill>
-                  <a:schemeClr val="dk1"/>
-                </a:solidFill>
-                <a:latin typeface="Calibri"/>
-                <a:ea typeface="Calibri"/>
-                <a:cs typeface="Calibri"/>
-                <a:sym typeface="Calibri"/>
-              </a:defRPr>
-            </a:lvl6pPr>
-            <a:lvl7pPr marR="0" lvl="6" algn="l" rtl="0">
-              <a:spcBef>
-                <a:spcPts val="0"/>
-              </a:spcBef>
-              <a:spcAft>
-                <a:spcPts val="0"/>
-              </a:spcAft>
-              <a:buSzPts val="1400"/>
-              <a:buNone/>
-              <a:defRPr sz="1800" b="0" i="0" u="none" strike="noStrike" cap="none">
-                <a:solidFill>
-                  <a:schemeClr val="dk1"/>
-                </a:solidFill>
-                <a:latin typeface="Calibri"/>
-                <a:ea typeface="Calibri"/>
-                <a:cs typeface="Calibri"/>
-                <a:sym typeface="Calibri"/>
-              </a:defRPr>
-            </a:lvl7pPr>
-            <a:lvl8pPr marR="0" lvl="7" algn="l" rtl="0">
-              <a:spcBef>
-                <a:spcPts val="0"/>
-              </a:spcBef>
-              <a:spcAft>
-                <a:spcPts val="0"/>
-              </a:spcAft>
-              <a:buSzPts val="1400"/>
-              <a:buNone/>
-              <a:defRPr sz="1800" b="0" i="0" u="none" strike="noStrike" cap="none">
-                <a:solidFill>
-                  <a:schemeClr val="dk1"/>
-                </a:solidFill>
-                <a:latin typeface="Calibri"/>
-                <a:ea typeface="Calibri"/>
-                <a:cs typeface="Calibri"/>
-                <a:sym typeface="Calibri"/>
-              </a:defRPr>
-            </a:lvl8pPr>
-            <a:lvl9pPr marR="0" lvl="8" algn="l" rtl="0">
-              <a:spcBef>
-                <a:spcPts val="0"/>
-              </a:spcBef>
-              <a:spcAft>
-                <a:spcPts val="0"/>
-              </a:spcAft>
-              <a:buSzPts val="1400"/>
-              <a:buNone/>
-              <a:defRPr sz="1800" b="0" i="0" u="none" strike="noStrike" cap="none">
-                <a:solidFill>
-                  <a:schemeClr val="dk1"/>
-                </a:solidFill>
-                <a:latin typeface="Calibri"/>
-                <a:ea typeface="Calibri"/>
-                <a:cs typeface="Calibri"/>
-                <a:sym typeface="Calibri"/>
-              </a:defRPr>
-            </a:lvl9pPr>
-          </a:lstStyle>
-          <a:p>
-            <a:endParaRPr/>
-          </a:p>
-        </p:txBody>
-      </p:sp>
-      <p:sp>
-        <p:nvSpPr>
-          <p:cNvPr id="38" name="Google Shape;38;p5"/>
-          <p:cNvSpPr txBox="1">
-            <a:spLocks noGrp="1"/>
-          </p:cNvSpPr>
-          <p:nvPr>
-            <p:ph type="ftr" idx="11"/>
-          </p:nvPr>
-        </p:nvSpPr>
-        <p:spPr>
-          <a:xfrm>
-            <a:off x="4038600" y="6356350"/>
-            <a:ext cx="4114800" cy="365125"/>
-          </a:xfrm>
-          <a:prstGeom prst="rect">
-            <a:avLst/>
-          </a:prstGeom>
-          <a:noFill/>
-          <a:ln>
-            <a:noFill/>
-          </a:ln>
-        </p:spPr>
-        <p:txBody>
-          <a:bodyPr spcFirstLastPara="1" wrap="square" lIns="91425" tIns="91425" rIns="91425" bIns="91425" anchor="ctr" anchorCtr="0">
-            <a:noAutofit/>
-          </a:bodyPr>
-          <a:lstStyle>
-            <a:lvl1pPr marR="0" lvl="0" algn="ctr" rtl="0">
-              <a:spcBef>
-                <a:spcPts val="0"/>
-              </a:spcBef>
-              <a:spcAft>
-                <a:spcPts val="0"/>
-              </a:spcAft>
-              <a:buSzPts val="1400"/>
-              <a:buNone/>
-              <a:defRPr sz="1200">
-                <a:solidFill>
-                  <a:srgbClr val="888888"/>
-                </a:solidFill>
-                <a:latin typeface="Calibri"/>
-                <a:ea typeface="Calibri"/>
-                <a:cs typeface="Calibri"/>
-                <a:sym typeface="Calibri"/>
-              </a:defRPr>
-            </a:lvl1pPr>
-            <a:lvl2pPr marR="0" lvl="1" algn="l" rtl="0">
-              <a:spcBef>
-                <a:spcPts val="0"/>
-              </a:spcBef>
-              <a:spcAft>
-                <a:spcPts val="0"/>
-              </a:spcAft>
-              <a:buSzPts val="1400"/>
-              <a:buNone/>
-              <a:defRPr sz="1800" b="0" i="0" u="none" strike="noStrike" cap="none">
-                <a:solidFill>
-                  <a:schemeClr val="dk1"/>
-                </a:solidFill>
-                <a:latin typeface="Calibri"/>
-                <a:ea typeface="Calibri"/>
-                <a:cs typeface="Calibri"/>
-                <a:sym typeface="Calibri"/>
-              </a:defRPr>
-            </a:lvl2pPr>
-            <a:lvl3pPr marR="0" lvl="2" algn="l" rtl="0">
-              <a:spcBef>
-                <a:spcPts val="0"/>
-              </a:spcBef>
-              <a:spcAft>
-                <a:spcPts val="0"/>
-              </a:spcAft>
-              <a:buSzPts val="1400"/>
-              <a:buNone/>
-              <a:defRPr sz="1800" b="0" i="0" u="none" strike="noStrike" cap="none">
-                <a:solidFill>
-                  <a:schemeClr val="dk1"/>
-                </a:solidFill>
-                <a:latin typeface="Calibri"/>
-                <a:ea typeface="Calibri"/>
-                <a:cs typeface="Calibri"/>
-                <a:sym typeface="Calibri"/>
-              </a:defRPr>
-            </a:lvl3pPr>
-            <a:lvl4pPr marR="0" lvl="3" algn="l" rtl="0">
-              <a:spcBef>
-                <a:spcPts val="0"/>
-              </a:spcBef>
-              <a:spcAft>
-                <a:spcPts val="0"/>
-              </a:spcAft>
-              <a:buSzPts val="1400"/>
-              <a:buNone/>
-              <a:defRPr sz="1800" b="0" i="0" u="none" strike="noStrike" cap="none">
-                <a:solidFill>
-                  <a:schemeClr val="dk1"/>
-                </a:solidFill>
-                <a:latin typeface="Calibri"/>
-                <a:ea typeface="Calibri"/>
-                <a:cs typeface="Calibri"/>
-                <a:sym typeface="Calibri"/>
-              </a:defRPr>
-            </a:lvl4pPr>
-            <a:lvl5pPr marR="0" lvl="4" algn="l" rtl="0">
-              <a:spcBef>
-                <a:spcPts val="0"/>
-              </a:spcBef>
-              <a:spcAft>
-                <a:spcPts val="0"/>
-              </a:spcAft>
-              <a:buSzPts val="1400"/>
-              <a:buNone/>
-              <a:defRPr sz="1800" b="0" i="0" u="none" strike="noStrike" cap="none">
-                <a:solidFill>
-                  <a:schemeClr val="dk1"/>
-                </a:solidFill>
-                <a:latin typeface="Calibri"/>
-                <a:ea typeface="Calibri"/>
-                <a:cs typeface="Calibri"/>
-                <a:sym typeface="Calibri"/>
-              </a:defRPr>
-            </a:lvl5pPr>
-            <a:lvl6pPr marR="0" lvl="5" algn="l" rtl="0">
-              <a:spcBef>
-                <a:spcPts val="0"/>
-              </a:spcBef>
-              <a:spcAft>
-                <a:spcPts val="0"/>
-              </a:spcAft>
-              <a:buSzPts val="1400"/>
-              <a:buNone/>
-              <a:defRPr sz="1800" b="0" i="0" u="none" strike="noStrike" cap="none">
-                <a:solidFill>
-                  <a:schemeClr val="dk1"/>
-                </a:solidFill>
-                <a:latin typeface="Calibri"/>
-                <a:ea typeface="Calibri"/>
-                <a:cs typeface="Calibri"/>
-                <a:sym typeface="Calibri"/>
-              </a:defRPr>
-            </a:lvl6pPr>
-            <a:lvl7pPr marR="0" lvl="6" algn="l" rtl="0">
-              <a:spcBef>
-                <a:spcPts val="0"/>
-              </a:spcBef>
-              <a:spcAft>
-                <a:spcPts val="0"/>
-              </a:spcAft>
-              <a:buSzPts val="1400"/>
-              <a:buNone/>
-              <a:defRPr sz="1800" b="0" i="0" u="none" strike="noStrike" cap="none">
-                <a:solidFill>
-                  <a:schemeClr val="dk1"/>
-                </a:solidFill>
-                <a:latin typeface="Calibri"/>
-                <a:ea typeface="Calibri"/>
-                <a:cs typeface="Calibri"/>
-                <a:sym typeface="Calibri"/>
-              </a:defRPr>
-            </a:lvl7pPr>
-            <a:lvl8pPr marR="0" lvl="7" algn="l" rtl="0">
-              <a:spcBef>
-                <a:spcPts val="0"/>
-              </a:spcBef>
-              <a:spcAft>
-                <a:spcPts val="0"/>
-              </a:spcAft>
-              <a:buSzPts val="1400"/>
-              <a:buNone/>
-              <a:defRPr sz="1800" b="0" i="0" u="none" strike="noStrike" cap="none">
-                <a:solidFill>
-                  <a:schemeClr val="dk1"/>
-                </a:solidFill>
-                <a:latin typeface="Calibri"/>
-                <a:ea typeface="Calibri"/>
-                <a:cs typeface="Calibri"/>
-                <a:sym typeface="Calibri"/>
-              </a:defRPr>
-            </a:lvl8pPr>
-            <a:lvl9pPr marR="0" lvl="8" algn="l" rtl="0">
-              <a:spcBef>
-                <a:spcPts val="0"/>
-              </a:spcBef>
-              <a:spcAft>
-                <a:spcPts val="0"/>
-              </a:spcAft>
-              <a:buSzPts val="1400"/>
-              <a:buNone/>
-              <a:defRPr sz="1800" b="0" i="0" u="none" strike="noStrike" cap="none">
-                <a:solidFill>
-                  <a:schemeClr val="dk1"/>
-                </a:solidFill>
-                <a:latin typeface="Calibri"/>
-                <a:ea typeface="Calibri"/>
-                <a:cs typeface="Calibri"/>
-                <a:sym typeface="Calibri"/>
-              </a:defRPr>
-            </a:lvl9pPr>
-          </a:lstStyle>
-          <a:p>
-            <a:endParaRPr/>
-          </a:p>
-        </p:txBody>
-      </p:sp>
-      <p:sp>
-        <p:nvSpPr>
-          <p:cNvPr id="39" name="Google Shape;39;p5"/>
-          <p:cNvSpPr txBox="1">
-            <a:spLocks noGrp="1"/>
-          </p:cNvSpPr>
-          <p:nvPr>
-            <p:ph type="sldNum" idx="12"/>
-          </p:nvPr>
-        </p:nvSpPr>
-        <p:spPr>
-          <a:xfrm>
-            <a:off x="8610600" y="6356350"/>
-            <a:ext cx="2743200" cy="365125"/>
-          </a:xfrm>
-          <a:prstGeom prst="rect">
-            <a:avLst/>
-          </a:prstGeom>
-          <a:noFill/>
-          <a:ln>
-            <a:noFill/>
-          </a:ln>
-        </p:spPr>
-        <p:txBody>
-          <a:bodyPr spcFirstLastPara="1" wrap="square" lIns="91425" tIns="45700" rIns="91425" bIns="45700" anchor="ctr" anchorCtr="0">
-            <a:noAutofit/>
-          </a:bodyPr>
-          <a:lstStyle>
-            <a:lvl1pPr marL="0" marR="0" lvl="0" indent="0" algn="r" rtl="0">
-              <a:spcBef>
-                <a:spcPts val="0"/>
-              </a:spcBef>
-              <a:buNone/>
-              <a:defRPr sz="1200">
-                <a:solidFill>
-                  <a:srgbClr val="888888"/>
-                </a:solidFill>
-                <a:latin typeface="Calibri"/>
-                <a:ea typeface="Calibri"/>
-                <a:cs typeface="Calibri"/>
-                <a:sym typeface="Calibri"/>
-              </a:defRPr>
-            </a:lvl1pPr>
-            <a:lvl2pPr marL="0" marR="0" lvl="1" indent="0" algn="r" rtl="0">
-              <a:spcBef>
-                <a:spcPts val="0"/>
-              </a:spcBef>
-              <a:buNone/>
-              <a:defRPr sz="1200">
-                <a:solidFill>
-                  <a:srgbClr val="888888"/>
-                </a:solidFill>
-                <a:latin typeface="Calibri"/>
-                <a:ea typeface="Calibri"/>
-                <a:cs typeface="Calibri"/>
-                <a:sym typeface="Calibri"/>
-              </a:defRPr>
-            </a:lvl2pPr>
-            <a:lvl3pPr marL="0" marR="0" lvl="2" indent="0" algn="r" rtl="0">
-              <a:spcBef>
-                <a:spcPts val="0"/>
-              </a:spcBef>
-              <a:buNone/>
-              <a:defRPr sz="1200">
-                <a:solidFill>
-                  <a:srgbClr val="888888"/>
-                </a:solidFill>
-                <a:latin typeface="Calibri"/>
-                <a:ea typeface="Calibri"/>
-                <a:cs typeface="Calibri"/>
-                <a:sym typeface="Calibri"/>
-              </a:defRPr>
-            </a:lvl3pPr>
-            <a:lvl4pPr marL="0" marR="0" lvl="3" indent="0" algn="r" rtl="0">
-              <a:spcBef>
-                <a:spcPts val="0"/>
-              </a:spcBef>
-              <a:buNone/>
-              <a:defRPr sz="1200">
-                <a:solidFill>
-                  <a:srgbClr val="888888"/>
-                </a:solidFill>
-                <a:latin typeface="Calibri"/>
-                <a:ea typeface="Calibri"/>
-                <a:cs typeface="Calibri"/>
-                <a:sym typeface="Calibri"/>
-              </a:defRPr>
-            </a:lvl4pPr>
-            <a:lvl5pPr marL="0" marR="0" lvl="4" indent="0" algn="r" rtl="0">
-              <a:spcBef>
-                <a:spcPts val="0"/>
-              </a:spcBef>
-              <a:buNone/>
-              <a:defRPr sz="1200">
-                <a:solidFill>
-                  <a:srgbClr val="888888"/>
-                </a:solidFill>
-                <a:latin typeface="Calibri"/>
-                <a:ea typeface="Calibri"/>
-                <a:cs typeface="Calibri"/>
-                <a:sym typeface="Calibri"/>
-              </a:defRPr>
-            </a:lvl5pPr>
-            <a:lvl6pPr marL="0" marR="0" lvl="5" indent="0" algn="r" rtl="0">
-              <a:spcBef>
-                <a:spcPts val="0"/>
-              </a:spcBef>
-              <a:buNone/>
-              <a:defRPr sz="1200">
-                <a:solidFill>
-                  <a:srgbClr val="888888"/>
-                </a:solidFill>
-                <a:latin typeface="Calibri"/>
-                <a:ea typeface="Calibri"/>
-                <a:cs typeface="Calibri"/>
-                <a:sym typeface="Calibri"/>
-              </a:defRPr>
-            </a:lvl6pPr>
-            <a:lvl7pPr marL="0" marR="0" lvl="6" indent="0" algn="r" rtl="0">
-              <a:spcBef>
-                <a:spcPts val="0"/>
-              </a:spcBef>
-              <a:buNone/>
-              <a:defRPr sz="1200">
-                <a:solidFill>
-                  <a:srgbClr val="888888"/>
-                </a:solidFill>
-                <a:latin typeface="Calibri"/>
-                <a:ea typeface="Calibri"/>
-                <a:cs typeface="Calibri"/>
-                <a:sym typeface="Calibri"/>
-              </a:defRPr>
-            </a:lvl7pPr>
-            <a:lvl8pPr marL="0" marR="0" lvl="7" indent="0" algn="r" rtl="0">
-              <a:spcBef>
-                <a:spcPts val="0"/>
-              </a:spcBef>
-              <a:buNone/>
-              <a:defRPr sz="1200">
-                <a:solidFill>
-                  <a:srgbClr val="888888"/>
-                </a:solidFill>
-                <a:latin typeface="Calibri"/>
-                <a:ea typeface="Calibri"/>
-                <a:cs typeface="Calibri"/>
-                <a:sym typeface="Calibri"/>
-              </a:defRPr>
-            </a:lvl8pPr>
-            <a:lvl9pPr marL="0" marR="0" lvl="8" indent="0" algn="r" rtl="0">
-              <a:spcBef>
-                <a:spcPts val="0"/>
-              </a:spcBef>
-              <a:buNone/>
-              <a:defRPr sz="1200">
-                <a:solidFill>
-                  <a:srgbClr val="888888"/>
-                </a:solidFill>
-                <a:latin typeface="Calibri"/>
-                <a:ea typeface="Calibri"/>
-                <a:cs typeface="Calibri"/>
-                <a:sym typeface="Calibri"/>
-              </a:defRPr>
-            </a:lvl9pPr>
-          </a:lstStyle>
-          <a:p>
-            <a:pPr marL="0" lvl="0" indent="0" algn="r" rtl="0">
-              <a:spcBef>
-                <a:spcPts val="0"/>
-              </a:spcBef>
-              <a:spcAft>
-                <a:spcPts val="0"/>
-              </a:spcAft>
-              <a:buNone/>
-            </a:pPr>
-            <a:fld id="{00000000-1234-1234-1234-123412341234}" type="slidenum">
-              <a:rPr lang="en-US"/>
-              <a:t>‹#›</a:t>
-            </a:fld>
-            <a:endParaRPr/>
-          </a:p>
-        </p:txBody>
-      </p:sp>
-    </p:spTree>
-  </p:cSld>
-  <p:clrMapOvr>
-    <a:masterClrMapping/>
-  </p:clrMapOvr>
-</p:sldLayout>
-</file>
-
-<file path=ppt/slideLayouts/slideLayout3.xml><?xml version="1.0" encoding="utf-8"?>
 <p:sldLayout xmlns:a="http://schemas.openxmlformats.org/drawingml/2006/main" xmlns:r="http://schemas.openxmlformats.org/officeDocument/2006/relationships" xmlns:p="http://schemas.openxmlformats.org/presentationml/2006/main" matchingName="Comparison" type="twoTxTwoObj">
   <p:cSld name="TWO_OBJECTS_WITH_TEXT">
     <p:spTree>
@@ -5459,7 +4425,7 @@
 </p:sldLayout>
 </file>
 
-<file path=ppt/slideLayouts/slideLayout4.xml><?xml version="1.0" encoding="utf-8"?>
+<file path=ppt/slideLayouts/slideLayout3.xml><?xml version="1.0" encoding="utf-8"?>
 <p:sldLayout xmlns:a="http://schemas.openxmlformats.org/drawingml/2006/main" xmlns:r="http://schemas.openxmlformats.org/officeDocument/2006/relationships" xmlns:p="http://schemas.openxmlformats.org/presentationml/2006/main" matchingName="Title Only" type="titleOnly">
   <p:cSld name="TITLE_ONLY">
     <p:spTree>
@@ -6224,7 +5190,7 @@
 </p:sldLayout>
 </file>
 
-<file path=ppt/slideLayouts/slideLayout5.xml><?xml version="1.0" encoding="utf-8"?>
+<file path=ppt/slideLayouts/slideLayout4.xml><?xml version="1.0" encoding="utf-8"?>
 <p:sldLayout xmlns:a="http://schemas.openxmlformats.org/drawingml/2006/main" xmlns:r="http://schemas.openxmlformats.org/officeDocument/2006/relationships" xmlns:p="http://schemas.openxmlformats.org/presentationml/2006/main" matchingName="Blank" type="blank">
   <p:cSld name="BLANK">
     <p:spTree>
@@ -6841,7 +5807,7 @@
 </p:sldLayout>
 </file>
 
-<file path=ppt/slideLayouts/slideLayout6.xml><?xml version="1.0" encoding="utf-8"?>
+<file path=ppt/slideLayouts/slideLayout5.xml><?xml version="1.0" encoding="utf-8"?>
 <p:sldLayout xmlns:a="http://schemas.openxmlformats.org/drawingml/2006/main" xmlns:r="http://schemas.openxmlformats.org/officeDocument/2006/relationships" xmlns:p="http://schemas.openxmlformats.org/presentationml/2006/main" matchingName="Content with Caption" type="objTx">
   <p:cSld name="OBJECT_WITH_CAPTION_TEXT">
     <p:spTree>
@@ -8142,7 +7108,7 @@
 </p:sldLayout>
 </file>
 
-<file path=ppt/slideLayouts/slideLayout7.xml><?xml version="1.0" encoding="utf-8"?>
+<file path=ppt/slideLayouts/slideLayout6.xml><?xml version="1.0" encoding="utf-8"?>
 <p:sldLayout xmlns:a="http://schemas.openxmlformats.org/drawingml/2006/main" xmlns:r="http://schemas.openxmlformats.org/officeDocument/2006/relationships" xmlns:p="http://schemas.openxmlformats.org/presentationml/2006/main" matchingName="Picture with Caption" type="picTx">
   <p:cSld name="PICTURE_WITH_CAPTION_TEXT">
     <p:spTree>
@@ -9443,7 +8409,7 @@
 </p:sldLayout>
 </file>
 
-<file path=ppt/slideLayouts/slideLayout8.xml><?xml version="1.0" encoding="utf-8"?>
+<file path=ppt/slideLayouts/slideLayout7.xml><?xml version="1.0" encoding="utf-8"?>
 <p:sldLayout xmlns:a="http://schemas.openxmlformats.org/drawingml/2006/main" xmlns:r="http://schemas.openxmlformats.org/officeDocument/2006/relationships" xmlns:p="http://schemas.openxmlformats.org/presentationml/2006/main" matchingName="Title and Vertical Text" type="vertTx">
   <p:cSld name="VERTICAL_TEXT">
     <p:spTree>
@@ -10476,7 +9442,7 @@
 </p:sldLayout>
 </file>
 
-<file path=ppt/slideLayouts/slideLayout9.xml><?xml version="1.0" encoding="utf-8"?>
+<file path=ppt/slideLayouts/slideLayout8.xml><?xml version="1.0" encoding="utf-8"?>
 <p:sldLayout xmlns:a="http://schemas.openxmlformats.org/drawingml/2006/main" xmlns:r="http://schemas.openxmlformats.org/officeDocument/2006/relationships" xmlns:p="http://schemas.openxmlformats.org/presentationml/2006/main" matchingName="Vertical Title and Text" type="vertTitleAndTx">
   <p:cSld name="VERTICAL_TITLE_AND_VERTICAL_TEXT">
     <p:spTree>
@@ -12547,14 +11513,13 @@
   <p:clrMap bg1="lt1" tx1="dk1" bg2="dk2" tx2="lt2" accent1="accent1" accent2="accent2" accent3="accent3" accent4="accent4" accent5="accent5" accent6="accent6" hlink="hlink" folHlink="folHlink"/>
   <p:sldLayoutIdLst>
     <p:sldLayoutId id="2147483649" r:id="rId1"/>
-    <p:sldLayoutId id="2147483651" r:id="rId2"/>
-    <p:sldLayoutId id="2147483652" r:id="rId3"/>
-    <p:sldLayoutId id="2147483653" r:id="rId4"/>
-    <p:sldLayoutId id="2147483654" r:id="rId5"/>
-    <p:sldLayoutId id="2147483655" r:id="rId6"/>
-    <p:sldLayoutId id="2147483656" r:id="rId7"/>
-    <p:sldLayoutId id="2147483657" r:id="rId8"/>
-    <p:sldLayoutId id="2147483658" r:id="rId9"/>
+    <p:sldLayoutId id="2147483652" r:id="rId2"/>
+    <p:sldLayoutId id="2147483653" r:id="rId3"/>
+    <p:sldLayoutId id="2147483654" r:id="rId4"/>
+    <p:sldLayoutId id="2147483655" r:id="rId5"/>
+    <p:sldLayoutId id="2147483656" r:id="rId6"/>
+    <p:sldLayoutId id="2147483657" r:id="rId7"/>
+    <p:sldLayoutId id="2147483658" r:id="rId8"/>
   </p:sldLayoutIdLst>
   <p:hf sldNum="0" hdr="0" ftr="0" dt="0"/>
   <p:txStyles>
@@ -13268,320 +12233,6 @@
       </p:grpSpPr>
       <p:sp>
         <p:nvSpPr>
-          <p:cNvPr id="5" name="TextBox 4">
-            <a:extLst>
-              <a:ext uri="{FF2B5EF4-FFF2-40B4-BE49-F238E27FC236}">
-                <a16:creationId xmlns:a16="http://schemas.microsoft.com/office/drawing/2014/main" id="{E72EEA3B-9D50-A145-B8FE-B6686486D979}"/>
-              </a:ext>
-            </a:extLst>
-          </p:cNvPr>
-          <p:cNvSpPr txBox="1"/>
-          <p:nvPr/>
-        </p:nvSpPr>
-        <p:spPr>
-          <a:xfrm>
-            <a:off x="345238" y="316349"/>
-            <a:ext cx="7463590" cy="3754874"/>
-          </a:xfrm>
-          <a:prstGeom prst="rect">
-            <a:avLst/>
-          </a:prstGeom>
-          <a:noFill/>
-        </p:spPr>
-        <p:txBody>
-          <a:bodyPr wrap="square" rtlCol="0">
-            <a:spAutoFit/>
-          </a:bodyPr>
-          <a:lstStyle/>
-          <a:p>
-            <a:r>
-              <a:rPr lang="en-US" dirty="0"/>
-              <a:t>Introduction into Statistics</a:t>
-            </a:r>
-          </a:p>
-          <a:p>
-            <a:endParaRPr lang="en-US" dirty="0"/>
-          </a:p>
-          <a:p>
-            <a:r>
-              <a:rPr lang="en-US" dirty="0"/>
-              <a:t>“Statistics is the study of the collection, analysis, </a:t>
-            </a:r>
-          </a:p>
-          <a:p>
-            <a:r>
-              <a:rPr lang="en-US" dirty="0"/>
-              <a:t>interpretation, presentation, and organization of data.” </a:t>
-            </a:r>
-          </a:p>
-          <a:p>
-            <a:endParaRPr lang="en-US" dirty="0"/>
-          </a:p>
-          <a:p>
-            <a:r>
-              <a:rPr lang="en-US" dirty="0"/>
-              <a:t>Being a Statistician is the major part of being a Data Scientist. </a:t>
-            </a:r>
-          </a:p>
-          <a:p>
-            <a:r>
-              <a:rPr lang="en-US" dirty="0"/>
-              <a:t>And it is tricky, because there is easy to misuse statistics:</a:t>
-            </a:r>
-          </a:p>
-          <a:p>
-            <a:r>
-              <a:rPr lang="en-US" b="1" dirty="0">
-                <a:solidFill>
-                  <a:srgbClr val="0070C0"/>
-                </a:solidFill>
-              </a:rPr>
-              <a:t>“There are three kinds of lies: lies, damned lies, and statistics.”</a:t>
-            </a:r>
-            <a:r>
-              <a:rPr lang="en-US" dirty="0"/>
-              <a:t> </a:t>
-            </a:r>
-          </a:p>
-          <a:p>
-            <a:endParaRPr lang="en-US" dirty="0"/>
-          </a:p>
-          <a:p>
-            <a:r>
-              <a:rPr lang="en-US" dirty="0"/>
-              <a:t>Statistics involves</a:t>
-            </a:r>
-          </a:p>
-          <a:p>
-            <a:endParaRPr lang="en-US" dirty="0"/>
-          </a:p>
-          <a:p>
-            <a:pPr marL="285750" indent="-285750">
-              <a:buFont typeface="Arial" panose="020B0604020202020204" pitchFamily="34" charset="0"/>
-              <a:buChar char="•"/>
-            </a:pPr>
-            <a:r>
-              <a:rPr lang="en-US" dirty="0"/>
-              <a:t>Collecting (sampling) the data from different kind of observations</a:t>
-            </a:r>
-          </a:p>
-          <a:p>
-            <a:pPr marL="285750" indent="-285750">
-              <a:buFont typeface="Arial" panose="020B0604020202020204" pitchFamily="34" charset="0"/>
-              <a:buChar char="•"/>
-            </a:pPr>
-            <a:r>
-              <a:rPr lang="en-US" dirty="0"/>
-              <a:t>Visualizing the data, estimating the parameters (average/mean values, errors, etc.)</a:t>
-            </a:r>
-          </a:p>
-          <a:p>
-            <a:pPr marL="285750" indent="-285750">
-              <a:buFont typeface="Arial" panose="020B0604020202020204" pitchFamily="34" charset="0"/>
-              <a:buChar char="•"/>
-            </a:pPr>
-            <a:r>
-              <a:rPr lang="en-US" dirty="0"/>
-              <a:t>Testing validity of a hypothesis (null hypothesis) – or alternative hypothesis</a:t>
-            </a:r>
-          </a:p>
-          <a:p>
-            <a:pPr marL="285750" indent="-285750">
-              <a:buFont typeface="Arial" panose="020B0604020202020204" pitchFamily="34" charset="0"/>
-              <a:buChar char="•"/>
-            </a:pPr>
-            <a:r>
-              <a:rPr lang="en-US" dirty="0"/>
-              <a:t>Estimating intervals, estimating significance of observed differences, etc.</a:t>
-            </a:r>
-          </a:p>
-          <a:p>
-            <a:endParaRPr lang="en-US" dirty="0"/>
-          </a:p>
-          <a:p>
-            <a:endParaRPr lang="en-US" dirty="0"/>
-          </a:p>
-        </p:txBody>
-      </p:sp>
-      <p:pic>
-        <p:nvPicPr>
-          <p:cNvPr id="2" name="Picture 1">
-            <a:extLst>
-              <a:ext uri="{FF2B5EF4-FFF2-40B4-BE49-F238E27FC236}">
-                <a16:creationId xmlns:a16="http://schemas.microsoft.com/office/drawing/2014/main" id="{B8D731C5-EDD2-C145-932A-A88B03CA2817}"/>
-              </a:ext>
-            </a:extLst>
-          </p:cNvPr>
-          <p:cNvPicPr>
-            <a:picLocks noChangeAspect="1"/>
-          </p:cNvPicPr>
-          <p:nvPr/>
-        </p:nvPicPr>
-        <p:blipFill>
-          <a:blip r:embed="rId2" cstate="email">
-            <a:extLst>
-              <a:ext uri="{28A0092B-C50C-407E-A947-70E740481C1C}">
-                <a14:useLocalDpi xmlns:a14="http://schemas.microsoft.com/office/drawing/2010/main"/>
-              </a:ext>
-            </a:extLst>
-          </a:blip>
-          <a:stretch>
-            <a:fillRect/>
-          </a:stretch>
-        </p:blipFill>
-        <p:spPr>
-          <a:xfrm>
-            <a:off x="8042994" y="894842"/>
-            <a:ext cx="3452730" cy="3601412"/>
-          </a:xfrm>
-          <a:prstGeom prst="rect">
-            <a:avLst/>
-          </a:prstGeom>
-        </p:spPr>
-      </p:pic>
-      <p:sp>
-        <p:nvSpPr>
-          <p:cNvPr id="3" name="TextBox 2">
-            <a:extLst>
-              <a:ext uri="{FF2B5EF4-FFF2-40B4-BE49-F238E27FC236}">
-                <a16:creationId xmlns:a16="http://schemas.microsoft.com/office/drawing/2014/main" id="{9A24CC4E-3332-5542-A614-EDEF0AE14AAA}"/>
-              </a:ext>
-            </a:extLst>
-          </p:cNvPr>
-          <p:cNvSpPr txBox="1"/>
-          <p:nvPr/>
-        </p:nvSpPr>
-        <p:spPr>
-          <a:xfrm>
-            <a:off x="7712242" y="433137"/>
-            <a:ext cx="3019926" cy="307777"/>
-          </a:xfrm>
-          <a:prstGeom prst="rect">
-            <a:avLst/>
-          </a:prstGeom>
-          <a:noFill/>
-        </p:spPr>
-        <p:txBody>
-          <a:bodyPr wrap="square" rtlCol="0">
-            <a:spAutoFit/>
-          </a:bodyPr>
-          <a:lstStyle/>
-          <a:p>
-            <a:r>
-              <a:rPr lang="en-US" b="1" dirty="0">
-                <a:solidFill>
-                  <a:srgbClr val="0070C0"/>
-                </a:solidFill>
-              </a:rPr>
-              <a:t>Here are some basic formulas:</a:t>
-            </a:r>
-          </a:p>
-        </p:txBody>
-      </p:sp>
-      <p:sp>
-        <p:nvSpPr>
-          <p:cNvPr id="6" name="TextBox 5">
-            <a:extLst>
-              <a:ext uri="{FF2B5EF4-FFF2-40B4-BE49-F238E27FC236}">
-                <a16:creationId xmlns:a16="http://schemas.microsoft.com/office/drawing/2014/main" id="{68CAE6D3-B545-F244-8CA7-FAE7513462A6}"/>
-              </a:ext>
-            </a:extLst>
-          </p:cNvPr>
-          <p:cNvSpPr txBox="1"/>
-          <p:nvPr/>
-        </p:nvSpPr>
-        <p:spPr>
-          <a:xfrm>
-            <a:off x="7074568" y="5029200"/>
-            <a:ext cx="4920916" cy="1600438"/>
-          </a:xfrm>
-          <a:prstGeom prst="rect">
-            <a:avLst/>
-          </a:prstGeom>
-          <a:noFill/>
-        </p:spPr>
-        <p:txBody>
-          <a:bodyPr wrap="square" rtlCol="0">
-            <a:spAutoFit/>
-          </a:bodyPr>
-          <a:lstStyle/>
-          <a:p>
-            <a:r>
-              <a:rPr lang="en-US" dirty="0"/>
-              <a:t>Intuitive explanation for dividing by (n-1) </a:t>
-            </a:r>
-          </a:p>
-          <a:p>
-            <a:r>
-              <a:rPr lang="en-US" dirty="0"/>
-              <a:t>when calculating standard deviation:</a:t>
-            </a:r>
-          </a:p>
-          <a:p>
-            <a:endParaRPr lang="en-US" dirty="0"/>
-          </a:p>
-          <a:p>
-            <a:r>
-              <a:rPr lang="en-US" dirty="0"/>
-              <a:t>– </a:t>
-            </a:r>
-            <a:r>
-              <a:rPr lang="en-US" dirty="0">
-                <a:hlinkClick r:id="rId3"/>
-              </a:rPr>
-              <a:t>http://</a:t>
-            </a:r>
-            <a:r>
-              <a:rPr lang="en-US" dirty="0" err="1">
-                <a:hlinkClick r:id="rId3"/>
-              </a:rPr>
-              <a:t>stats.stackexchange.com</a:t>
-            </a:r>
-            <a:r>
-              <a:rPr lang="en-US" dirty="0">
-                <a:hlinkClick r:id="rId3"/>
-              </a:rPr>
-              <a:t>/questions/3931/intuitive-explanation-for-dividing-by-n-1-when-calculating-standard-deviation</a:t>
-            </a:r>
-            <a:endParaRPr lang="en-US" dirty="0"/>
-          </a:p>
-          <a:p>
-            <a:endParaRPr lang="en-US" dirty="0"/>
-          </a:p>
-        </p:txBody>
-      </p:sp>
-    </p:spTree>
-    <p:extLst>
-      <p:ext uri="{BB962C8B-B14F-4D97-AF65-F5344CB8AC3E}">
-        <p14:creationId xmlns:p14="http://schemas.microsoft.com/office/powerpoint/2010/main" val="4004690225"/>
-      </p:ext>
-    </p:extLst>
-  </p:cSld>
-  <p:clrMapOvr>
-    <a:masterClrMapping/>
-  </p:clrMapOvr>
-</p:sld>
-</file>
-
-<file path=ppt/slides/slide2.xml><?xml version="1.0" encoding="utf-8"?>
-<p:sld xmlns:a="http://schemas.openxmlformats.org/drawingml/2006/main" xmlns:r="http://schemas.openxmlformats.org/officeDocument/2006/relationships" xmlns:p="http://schemas.openxmlformats.org/presentationml/2006/main">
-  <p:cSld>
-    <p:spTree>
-      <p:nvGrpSpPr>
-        <p:cNvPr id="1" name=""/>
-        <p:cNvGrpSpPr/>
-        <p:nvPr/>
-      </p:nvGrpSpPr>
-      <p:grpSpPr>
-        <a:xfrm>
-          <a:off x="0" y="0"/>
-          <a:ext cx="0" cy="0"/>
-          <a:chOff x="0" y="0"/>
-          <a:chExt cx="0" cy="0"/>
-        </a:xfrm>
-      </p:grpSpPr>
-      <p:sp>
-        <p:nvSpPr>
           <p:cNvPr id="4" name="TextBox 3">
             <a:extLst>
               <a:ext uri="{FF2B5EF4-FFF2-40B4-BE49-F238E27FC236}">
@@ -13713,7 +12364,7 @@
           <a:graphicData uri="http://schemas.openxmlformats.org/presentationml/2006/ole">
             <mc:AlternateContent xmlns:mc="http://schemas.openxmlformats.org/markup-compatibility/2006">
               <mc:Choice xmlns:v="urn:schemas-microsoft-com:vml" Requires="v">
-                <p:oleObj spid="_x0000_s10405" name="Equation" r:id="rId5" imgW="876240" imgH="457200" progId="Equation.DSMT4">
+                <p:oleObj spid="_x0000_s10408" name="Equation" r:id="rId5" imgW="876240" imgH="457200" progId="Equation.DSMT4">
                   <p:embed/>
                 </p:oleObj>
               </mc:Choice>
@@ -13753,7 +12404,6 @@
                       <a:ln>
                         <a:noFill/>
                       </a:ln>
-                      <a:extLst/>
                     </p:spPr>
                   </p:pic>
                 </p:oleObj>
@@ -14169,7 +12819,7 @@
 </p:sld>
 </file>
 
-<file path=ppt/slides/slide3.xml><?xml version="1.0" encoding="utf-8"?>
+<file path=ppt/slides/slide2.xml><?xml version="1.0" encoding="utf-8"?>
 <p:sld xmlns:a="http://schemas.openxmlformats.org/drawingml/2006/main" xmlns:r="http://schemas.openxmlformats.org/officeDocument/2006/relationships" xmlns:p="http://schemas.openxmlformats.org/presentationml/2006/main">
   <p:cSld>
     <p:spTree>
@@ -15196,7 +13846,7 @@
 </p:sld>
 </file>
 
-<file path=ppt/slides/slide4.xml><?xml version="1.0" encoding="utf-8"?>
+<file path=ppt/slides/slide3.xml><?xml version="1.0" encoding="utf-8"?>
 <p:sld xmlns:a="http://schemas.openxmlformats.org/drawingml/2006/main" xmlns:r="http://schemas.openxmlformats.org/officeDocument/2006/relationships" xmlns:p="http://schemas.openxmlformats.org/presentationml/2006/main">
   <p:cSld>
     <p:spTree>
@@ -15781,7 +14431,7 @@
 </p:sld>
 </file>
 
-<file path=ppt/slides/slide5.xml><?xml version="1.0" encoding="utf-8"?>
+<file path=ppt/slides/slide4.xml><?xml version="1.0" encoding="utf-8"?>
 <p:sld xmlns:a="http://schemas.openxmlformats.org/drawingml/2006/main" xmlns:r="http://schemas.openxmlformats.org/officeDocument/2006/relationships" xmlns:p="http://schemas.openxmlformats.org/presentationml/2006/main">
   <p:cSld>
     <p:spTree>
@@ -16900,7 +15550,7 @@
 </p:sld>
 </file>
 
-<file path=ppt/slides/slide6.xml><?xml version="1.0" encoding="utf-8"?>
+<file path=ppt/slides/slide5.xml><?xml version="1.0" encoding="utf-8"?>
 <p:sld xmlns:a="http://schemas.openxmlformats.org/drawingml/2006/main" xmlns:r="http://schemas.openxmlformats.org/officeDocument/2006/relationships" xmlns:p="http://schemas.openxmlformats.org/presentationml/2006/main">
   <p:cSld>
     <p:spTree>

--- a/statistics_03_linear_regression.pptx
+++ b/statistics_03_linear_regression.pptx
@@ -5,7 +5,7 @@
     <p:sldMasterId id="2147483659" r:id="rId1"/>
   </p:sldMasterIdLst>
   <p:notesMasterIdLst>
-    <p:notesMasterId r:id="rId7"/>
+    <p:notesMasterId r:id="rId10"/>
   </p:notesMasterIdLst>
   <p:sldIdLst>
     <p:sldId id="285" r:id="rId2"/>
@@ -13,6 +13,9 @@
     <p:sldId id="300" r:id="rId4"/>
     <p:sldId id="288" r:id="rId5"/>
     <p:sldId id="301" r:id="rId6"/>
+    <p:sldId id="302" r:id="rId7"/>
+    <p:sldId id="303" r:id="rId8"/>
+    <p:sldId id="260" r:id="rId9"/>
   </p:sldIdLst>
   <p:sldSz cx="12192000" cy="6858000"/>
   <p:notesSz cx="6858000" cy="9144000"/>
@@ -1555,6 +1558,115 @@
 </p:notes>
 </file>
 
+<file path=ppt/notesSlides/notesSlide2.xml><?xml version="1.0" encoding="utf-8"?>
+<p:notes xmlns:a="http://schemas.openxmlformats.org/drawingml/2006/main" xmlns:r="http://schemas.openxmlformats.org/officeDocument/2006/relationships" xmlns:p="http://schemas.openxmlformats.org/presentationml/2006/main" showMasterSp="0" showMasterPhAnim="0">
+  <p:cSld>
+    <p:spTree>
+      <p:nvGrpSpPr>
+        <p:cNvPr id="1" name="Shape 112"/>
+        <p:cNvGrpSpPr/>
+        <p:nvPr/>
+      </p:nvGrpSpPr>
+      <p:grpSpPr>
+        <a:xfrm>
+          <a:off x="0" y="0"/>
+          <a:ext cx="0" cy="0"/>
+          <a:chOff x="0" y="0"/>
+          <a:chExt cx="0" cy="0"/>
+        </a:xfrm>
+      </p:grpSpPr>
+      <p:sp>
+        <p:nvSpPr>
+          <p:cNvPr id="113" name="Google Shape;113;g3d5559a5d7_0_0:notes"/>
+          <p:cNvSpPr txBox="1">
+            <a:spLocks noGrp="1"/>
+          </p:cNvSpPr>
+          <p:nvPr>
+            <p:ph type="body" idx="1"/>
+          </p:nvPr>
+        </p:nvSpPr>
+        <p:spPr>
+          <a:xfrm>
+            <a:off x="685800" y="4400550"/>
+            <a:ext cx="5486400" cy="3600600"/>
+          </a:xfrm>
+          <a:prstGeom prst="rect">
+            <a:avLst/>
+          </a:prstGeom>
+        </p:spPr>
+        <p:txBody>
+          <a:bodyPr spcFirstLastPara="1" wrap="square" lIns="91425" tIns="91425" rIns="91425" bIns="91425" anchor="t" anchorCtr="0">
+            <a:noAutofit/>
+          </a:bodyPr>
+          <a:lstStyle/>
+          <a:p>
+            <a:pPr marL="0" lvl="0" indent="0" algn="l" rtl="0">
+              <a:spcBef>
+                <a:spcPts val="0"/>
+              </a:spcBef>
+              <a:spcAft>
+                <a:spcPts val="0"/>
+              </a:spcAft>
+              <a:buNone/>
+            </a:pPr>
+            <a:endParaRPr/>
+          </a:p>
+        </p:txBody>
+      </p:sp>
+      <p:sp>
+        <p:nvSpPr>
+          <p:cNvPr id="114" name="Google Shape;114;g3d5559a5d7_0_0:notes"/>
+          <p:cNvSpPr>
+            <a:spLocks noGrp="1" noRot="1" noChangeAspect="1"/>
+          </p:cNvSpPr>
+          <p:nvPr>
+            <p:ph type="sldImg" idx="2"/>
+          </p:nvPr>
+        </p:nvSpPr>
+        <p:spPr>
+          <a:xfrm>
+            <a:off x="685800" y="1143000"/>
+            <a:ext cx="5486400" cy="3086100"/>
+          </a:xfrm>
+          <a:custGeom>
+            <a:avLst/>
+            <a:gdLst/>
+            <a:ahLst/>
+            <a:cxnLst/>
+            <a:rect l="l" t="t" r="r" b="b"/>
+            <a:pathLst>
+              <a:path w="120000" h="120000" extrusionOk="0">
+                <a:moveTo>
+                  <a:pt x="0" y="0"/>
+                </a:moveTo>
+                <a:lnTo>
+                  <a:pt x="120000" y="0"/>
+                </a:lnTo>
+                <a:lnTo>
+                  <a:pt x="120000" y="120000"/>
+                </a:lnTo>
+                <a:lnTo>
+                  <a:pt x="0" y="120000"/>
+                </a:lnTo>
+                <a:close/>
+              </a:path>
+            </a:pathLst>
+          </a:custGeom>
+        </p:spPr>
+      </p:sp>
+    </p:spTree>
+    <p:extLst>
+      <p:ext uri="{BB962C8B-B14F-4D97-AF65-F5344CB8AC3E}">
+        <p14:creationId xmlns:p14="http://schemas.microsoft.com/office/powerpoint/2010/main" val="3153809544"/>
+      </p:ext>
+    </p:extLst>
+  </p:cSld>
+  <p:clrMapOvr>
+    <a:masterClrMapping/>
+  </p:clrMapOvr>
+</p:notes>
+</file>
+
 <file path=ppt/slideLayouts/slideLayout1.xml><?xml version="1.0" encoding="utf-8"?>
 <p:sldLayout xmlns:a="http://schemas.openxmlformats.org/drawingml/2006/main" xmlns:r="http://schemas.openxmlformats.org/officeDocument/2006/relationships" xmlns:p="http://schemas.openxmlformats.org/presentationml/2006/main" matchingName="Title and Content" type="obj">
   <p:cSld name="OBJECT">
@@ -10468,6 +10580,1044 @@
         </p:txBody>
       </p:sp>
     </p:spTree>
+  </p:cSld>
+  <p:clrMapOvr>
+    <a:masterClrMapping/>
+  </p:clrMapOvr>
+</p:sldLayout>
+</file>
+
+<file path=ppt/slideLayouts/slideLayout9.xml><?xml version="1.0" encoding="utf-8"?>
+<p:sldLayout xmlns:a="http://schemas.openxmlformats.org/drawingml/2006/main" xmlns:r="http://schemas.openxmlformats.org/officeDocument/2006/relationships" xmlns:p="http://schemas.openxmlformats.org/presentationml/2006/main" matchingName="Title Slide" type="title">
+  <p:cSld name="Title Slide">
+    <p:spTree>
+      <p:nvGrpSpPr>
+        <p:cNvPr id="1" name="Shape 15"/>
+        <p:cNvGrpSpPr/>
+        <p:nvPr/>
+      </p:nvGrpSpPr>
+      <p:grpSpPr>
+        <a:xfrm>
+          <a:off x="0" y="0"/>
+          <a:ext cx="0" cy="0"/>
+          <a:chOff x="0" y="0"/>
+          <a:chExt cx="0" cy="0"/>
+        </a:xfrm>
+      </p:grpSpPr>
+      <p:sp>
+        <p:nvSpPr>
+          <p:cNvPr id="16" name="Google Shape;16;p2"/>
+          <p:cNvSpPr txBox="1">
+            <a:spLocks noGrp="1"/>
+          </p:cNvSpPr>
+          <p:nvPr>
+            <p:ph type="ctrTitle"/>
+          </p:nvPr>
+        </p:nvSpPr>
+        <p:spPr>
+          <a:xfrm>
+            <a:off x="1524000" y="1122363"/>
+            <a:ext cx="9144000" cy="2387600"/>
+          </a:xfrm>
+          <a:prstGeom prst="rect">
+            <a:avLst/>
+          </a:prstGeom>
+          <a:noFill/>
+          <a:ln>
+            <a:noFill/>
+          </a:ln>
+        </p:spPr>
+        <p:txBody>
+          <a:bodyPr spcFirstLastPara="1" wrap="square" lIns="91425" tIns="91425" rIns="91425" bIns="91425" anchor="b" anchorCtr="0">
+            <a:noAutofit/>
+          </a:bodyPr>
+          <a:lstStyle>
+            <a:lvl1pPr marR="0" lvl="0" algn="ctr" rtl="0">
+              <a:lnSpc>
+                <a:spcPct val="90000"/>
+              </a:lnSpc>
+              <a:spcBef>
+                <a:spcPts val="0"/>
+              </a:spcBef>
+              <a:spcAft>
+                <a:spcPts val="0"/>
+              </a:spcAft>
+              <a:buClr>
+                <a:schemeClr val="dk1"/>
+              </a:buClr>
+              <a:buSzPts val="6000"/>
+              <a:buFont typeface="Calibri"/>
+              <a:buNone/>
+              <a:defRPr sz="6000" b="0" i="0" u="none" strike="noStrike" cap="none">
+                <a:solidFill>
+                  <a:schemeClr val="dk1"/>
+                </a:solidFill>
+                <a:latin typeface="Calibri"/>
+                <a:ea typeface="Calibri"/>
+                <a:cs typeface="Calibri"/>
+                <a:sym typeface="Calibri"/>
+              </a:defRPr>
+            </a:lvl1pPr>
+            <a:lvl2pPr lvl="1">
+              <a:spcBef>
+                <a:spcPts val="0"/>
+              </a:spcBef>
+              <a:spcAft>
+                <a:spcPts val="0"/>
+              </a:spcAft>
+              <a:buSzPts val="1400"/>
+              <a:buNone/>
+              <a:defRPr sz="1800"/>
+            </a:lvl2pPr>
+            <a:lvl3pPr lvl="2">
+              <a:spcBef>
+                <a:spcPts val="0"/>
+              </a:spcBef>
+              <a:spcAft>
+                <a:spcPts val="0"/>
+              </a:spcAft>
+              <a:buSzPts val="1400"/>
+              <a:buNone/>
+              <a:defRPr sz="1800"/>
+            </a:lvl3pPr>
+            <a:lvl4pPr lvl="3">
+              <a:spcBef>
+                <a:spcPts val="0"/>
+              </a:spcBef>
+              <a:spcAft>
+                <a:spcPts val="0"/>
+              </a:spcAft>
+              <a:buSzPts val="1400"/>
+              <a:buNone/>
+              <a:defRPr sz="1800"/>
+            </a:lvl4pPr>
+            <a:lvl5pPr lvl="4">
+              <a:spcBef>
+                <a:spcPts val="0"/>
+              </a:spcBef>
+              <a:spcAft>
+                <a:spcPts val="0"/>
+              </a:spcAft>
+              <a:buSzPts val="1400"/>
+              <a:buNone/>
+              <a:defRPr sz="1800"/>
+            </a:lvl5pPr>
+            <a:lvl6pPr lvl="5">
+              <a:spcBef>
+                <a:spcPts val="0"/>
+              </a:spcBef>
+              <a:spcAft>
+                <a:spcPts val="0"/>
+              </a:spcAft>
+              <a:buSzPts val="1400"/>
+              <a:buNone/>
+              <a:defRPr sz="1800"/>
+            </a:lvl6pPr>
+            <a:lvl7pPr lvl="6">
+              <a:spcBef>
+                <a:spcPts val="0"/>
+              </a:spcBef>
+              <a:spcAft>
+                <a:spcPts val="0"/>
+              </a:spcAft>
+              <a:buSzPts val="1400"/>
+              <a:buNone/>
+              <a:defRPr sz="1800"/>
+            </a:lvl7pPr>
+            <a:lvl8pPr lvl="7">
+              <a:spcBef>
+                <a:spcPts val="0"/>
+              </a:spcBef>
+              <a:spcAft>
+                <a:spcPts val="0"/>
+              </a:spcAft>
+              <a:buSzPts val="1400"/>
+              <a:buNone/>
+              <a:defRPr sz="1800"/>
+            </a:lvl8pPr>
+            <a:lvl9pPr lvl="8">
+              <a:spcBef>
+                <a:spcPts val="0"/>
+              </a:spcBef>
+              <a:spcAft>
+                <a:spcPts val="0"/>
+              </a:spcAft>
+              <a:buSzPts val="1400"/>
+              <a:buNone/>
+              <a:defRPr sz="1800"/>
+            </a:lvl9pPr>
+          </a:lstStyle>
+          <a:p>
+            <a:endParaRPr/>
+          </a:p>
+        </p:txBody>
+      </p:sp>
+      <p:sp>
+        <p:nvSpPr>
+          <p:cNvPr id="17" name="Google Shape;17;p2"/>
+          <p:cNvSpPr txBox="1">
+            <a:spLocks noGrp="1"/>
+          </p:cNvSpPr>
+          <p:nvPr>
+            <p:ph type="subTitle" idx="1"/>
+          </p:nvPr>
+        </p:nvSpPr>
+        <p:spPr>
+          <a:xfrm>
+            <a:off x="1524000" y="3602038"/>
+            <a:ext cx="9144000" cy="1655762"/>
+          </a:xfrm>
+          <a:prstGeom prst="rect">
+            <a:avLst/>
+          </a:prstGeom>
+          <a:noFill/>
+          <a:ln>
+            <a:noFill/>
+          </a:ln>
+        </p:spPr>
+        <p:txBody>
+          <a:bodyPr spcFirstLastPara="1" wrap="square" lIns="91425" tIns="91425" rIns="91425" bIns="91425" anchor="t" anchorCtr="0">
+            <a:noAutofit/>
+          </a:bodyPr>
+          <a:lstStyle>
+            <a:lvl1pPr marR="0" lvl="0" algn="ctr" rtl="0">
+              <a:lnSpc>
+                <a:spcPct val="90000"/>
+              </a:lnSpc>
+              <a:spcBef>
+                <a:spcPts val="1000"/>
+              </a:spcBef>
+              <a:spcAft>
+                <a:spcPts val="0"/>
+              </a:spcAft>
+              <a:buClr>
+                <a:schemeClr val="dk1"/>
+              </a:buClr>
+              <a:buSzPts val="2400"/>
+              <a:buFont typeface="Arial"/>
+              <a:buNone/>
+              <a:defRPr sz="2400" b="0" i="0" u="none" strike="noStrike" cap="none">
+                <a:solidFill>
+                  <a:schemeClr val="dk1"/>
+                </a:solidFill>
+                <a:latin typeface="Calibri"/>
+                <a:ea typeface="Calibri"/>
+                <a:cs typeface="Calibri"/>
+                <a:sym typeface="Calibri"/>
+              </a:defRPr>
+            </a:lvl1pPr>
+            <a:lvl2pPr marR="0" lvl="1" algn="ctr" rtl="0">
+              <a:lnSpc>
+                <a:spcPct val="90000"/>
+              </a:lnSpc>
+              <a:spcBef>
+                <a:spcPts val="500"/>
+              </a:spcBef>
+              <a:spcAft>
+                <a:spcPts val="0"/>
+              </a:spcAft>
+              <a:buClr>
+                <a:schemeClr val="dk1"/>
+              </a:buClr>
+              <a:buSzPts val="2000"/>
+              <a:buFont typeface="Arial"/>
+              <a:buNone/>
+              <a:defRPr sz="2000" b="0" i="0" u="none" strike="noStrike" cap="none">
+                <a:solidFill>
+                  <a:schemeClr val="dk1"/>
+                </a:solidFill>
+                <a:latin typeface="Calibri"/>
+                <a:ea typeface="Calibri"/>
+                <a:cs typeface="Calibri"/>
+                <a:sym typeface="Calibri"/>
+              </a:defRPr>
+            </a:lvl2pPr>
+            <a:lvl3pPr marR="0" lvl="2" algn="ctr" rtl="0">
+              <a:lnSpc>
+                <a:spcPct val="90000"/>
+              </a:lnSpc>
+              <a:spcBef>
+                <a:spcPts val="500"/>
+              </a:spcBef>
+              <a:spcAft>
+                <a:spcPts val="0"/>
+              </a:spcAft>
+              <a:buClr>
+                <a:schemeClr val="dk1"/>
+              </a:buClr>
+              <a:buSzPts val="1800"/>
+              <a:buFont typeface="Arial"/>
+              <a:buNone/>
+              <a:defRPr sz="1800" b="0" i="0" u="none" strike="noStrike" cap="none">
+                <a:solidFill>
+                  <a:schemeClr val="dk1"/>
+                </a:solidFill>
+                <a:latin typeface="Calibri"/>
+                <a:ea typeface="Calibri"/>
+                <a:cs typeface="Calibri"/>
+                <a:sym typeface="Calibri"/>
+              </a:defRPr>
+            </a:lvl3pPr>
+            <a:lvl4pPr marR="0" lvl="3" algn="ctr" rtl="0">
+              <a:lnSpc>
+                <a:spcPct val="90000"/>
+              </a:lnSpc>
+              <a:spcBef>
+                <a:spcPts val="500"/>
+              </a:spcBef>
+              <a:spcAft>
+                <a:spcPts val="0"/>
+              </a:spcAft>
+              <a:buClr>
+                <a:schemeClr val="dk1"/>
+              </a:buClr>
+              <a:buSzPts val="1600"/>
+              <a:buFont typeface="Arial"/>
+              <a:buNone/>
+              <a:defRPr sz="1600" b="0" i="0" u="none" strike="noStrike" cap="none">
+                <a:solidFill>
+                  <a:schemeClr val="dk1"/>
+                </a:solidFill>
+                <a:latin typeface="Calibri"/>
+                <a:ea typeface="Calibri"/>
+                <a:cs typeface="Calibri"/>
+                <a:sym typeface="Calibri"/>
+              </a:defRPr>
+            </a:lvl4pPr>
+            <a:lvl5pPr marR="0" lvl="4" algn="ctr" rtl="0">
+              <a:lnSpc>
+                <a:spcPct val="90000"/>
+              </a:lnSpc>
+              <a:spcBef>
+                <a:spcPts val="500"/>
+              </a:spcBef>
+              <a:spcAft>
+                <a:spcPts val="0"/>
+              </a:spcAft>
+              <a:buClr>
+                <a:schemeClr val="dk1"/>
+              </a:buClr>
+              <a:buSzPts val="1600"/>
+              <a:buFont typeface="Arial"/>
+              <a:buNone/>
+              <a:defRPr sz="1600" b="0" i="0" u="none" strike="noStrike" cap="none">
+                <a:solidFill>
+                  <a:schemeClr val="dk1"/>
+                </a:solidFill>
+                <a:latin typeface="Calibri"/>
+                <a:ea typeface="Calibri"/>
+                <a:cs typeface="Calibri"/>
+                <a:sym typeface="Calibri"/>
+              </a:defRPr>
+            </a:lvl5pPr>
+            <a:lvl6pPr marR="0" lvl="5" algn="ctr" rtl="0">
+              <a:lnSpc>
+                <a:spcPct val="90000"/>
+              </a:lnSpc>
+              <a:spcBef>
+                <a:spcPts val="500"/>
+              </a:spcBef>
+              <a:spcAft>
+                <a:spcPts val="0"/>
+              </a:spcAft>
+              <a:buClr>
+                <a:schemeClr val="dk1"/>
+              </a:buClr>
+              <a:buSzPts val="1600"/>
+              <a:buFont typeface="Arial"/>
+              <a:buNone/>
+              <a:defRPr sz="1600" b="0" i="0" u="none" strike="noStrike" cap="none">
+                <a:solidFill>
+                  <a:schemeClr val="dk1"/>
+                </a:solidFill>
+                <a:latin typeface="Calibri"/>
+                <a:ea typeface="Calibri"/>
+                <a:cs typeface="Calibri"/>
+                <a:sym typeface="Calibri"/>
+              </a:defRPr>
+            </a:lvl6pPr>
+            <a:lvl7pPr marR="0" lvl="6" algn="ctr" rtl="0">
+              <a:lnSpc>
+                <a:spcPct val="90000"/>
+              </a:lnSpc>
+              <a:spcBef>
+                <a:spcPts val="500"/>
+              </a:spcBef>
+              <a:spcAft>
+                <a:spcPts val="0"/>
+              </a:spcAft>
+              <a:buClr>
+                <a:schemeClr val="dk1"/>
+              </a:buClr>
+              <a:buSzPts val="1600"/>
+              <a:buFont typeface="Arial"/>
+              <a:buNone/>
+              <a:defRPr sz="1600" b="0" i="0" u="none" strike="noStrike" cap="none">
+                <a:solidFill>
+                  <a:schemeClr val="dk1"/>
+                </a:solidFill>
+                <a:latin typeface="Calibri"/>
+                <a:ea typeface="Calibri"/>
+                <a:cs typeface="Calibri"/>
+                <a:sym typeface="Calibri"/>
+              </a:defRPr>
+            </a:lvl7pPr>
+            <a:lvl8pPr marR="0" lvl="7" algn="ctr" rtl="0">
+              <a:lnSpc>
+                <a:spcPct val="90000"/>
+              </a:lnSpc>
+              <a:spcBef>
+                <a:spcPts val="500"/>
+              </a:spcBef>
+              <a:spcAft>
+                <a:spcPts val="0"/>
+              </a:spcAft>
+              <a:buClr>
+                <a:schemeClr val="dk1"/>
+              </a:buClr>
+              <a:buSzPts val="1600"/>
+              <a:buFont typeface="Arial"/>
+              <a:buNone/>
+              <a:defRPr sz="1600" b="0" i="0" u="none" strike="noStrike" cap="none">
+                <a:solidFill>
+                  <a:schemeClr val="dk1"/>
+                </a:solidFill>
+                <a:latin typeface="Calibri"/>
+                <a:ea typeface="Calibri"/>
+                <a:cs typeface="Calibri"/>
+                <a:sym typeface="Calibri"/>
+              </a:defRPr>
+            </a:lvl8pPr>
+            <a:lvl9pPr marR="0" lvl="8" algn="ctr" rtl="0">
+              <a:lnSpc>
+                <a:spcPct val="90000"/>
+              </a:lnSpc>
+              <a:spcBef>
+                <a:spcPts val="500"/>
+              </a:spcBef>
+              <a:spcAft>
+                <a:spcPts val="0"/>
+              </a:spcAft>
+              <a:buClr>
+                <a:schemeClr val="dk1"/>
+              </a:buClr>
+              <a:buSzPts val="1600"/>
+              <a:buFont typeface="Arial"/>
+              <a:buNone/>
+              <a:defRPr sz="1600" b="0" i="0" u="none" strike="noStrike" cap="none">
+                <a:solidFill>
+                  <a:schemeClr val="dk1"/>
+                </a:solidFill>
+                <a:latin typeface="Calibri"/>
+                <a:ea typeface="Calibri"/>
+                <a:cs typeface="Calibri"/>
+                <a:sym typeface="Calibri"/>
+              </a:defRPr>
+            </a:lvl9pPr>
+          </a:lstStyle>
+          <a:p>
+            <a:endParaRPr/>
+          </a:p>
+        </p:txBody>
+      </p:sp>
+      <p:sp>
+        <p:nvSpPr>
+          <p:cNvPr id="18" name="Google Shape;18;p2"/>
+          <p:cNvSpPr txBox="1">
+            <a:spLocks noGrp="1"/>
+          </p:cNvSpPr>
+          <p:nvPr>
+            <p:ph type="dt" idx="10"/>
+          </p:nvPr>
+        </p:nvSpPr>
+        <p:spPr>
+          <a:xfrm>
+            <a:off x="838200" y="6356350"/>
+            <a:ext cx="2743200" cy="365125"/>
+          </a:xfrm>
+          <a:prstGeom prst="rect">
+            <a:avLst/>
+          </a:prstGeom>
+          <a:noFill/>
+          <a:ln>
+            <a:noFill/>
+          </a:ln>
+        </p:spPr>
+        <p:txBody>
+          <a:bodyPr spcFirstLastPara="1" wrap="square" lIns="91425" tIns="91425" rIns="91425" bIns="91425" anchor="ctr" anchorCtr="0">
+            <a:noAutofit/>
+          </a:bodyPr>
+          <a:lstStyle>
+            <a:lvl1pPr marR="0" lvl="0" algn="l" rtl="0">
+              <a:spcBef>
+                <a:spcPts val="0"/>
+              </a:spcBef>
+              <a:spcAft>
+                <a:spcPts val="0"/>
+              </a:spcAft>
+              <a:buSzPts val="1400"/>
+              <a:buNone/>
+              <a:defRPr sz="1200" b="0" i="0" u="none" strike="noStrike" cap="none">
+                <a:solidFill>
+                  <a:srgbClr val="888888"/>
+                </a:solidFill>
+                <a:latin typeface="Calibri"/>
+                <a:ea typeface="Calibri"/>
+                <a:cs typeface="Calibri"/>
+                <a:sym typeface="Calibri"/>
+              </a:defRPr>
+            </a:lvl1pPr>
+            <a:lvl2pPr marR="0" lvl="1" algn="l" rtl="0">
+              <a:spcBef>
+                <a:spcPts val="0"/>
+              </a:spcBef>
+              <a:spcAft>
+                <a:spcPts val="0"/>
+              </a:spcAft>
+              <a:buSzPts val="1400"/>
+              <a:buNone/>
+              <a:defRPr sz="1800" b="0" i="0" u="none" strike="noStrike" cap="none">
+                <a:solidFill>
+                  <a:schemeClr val="dk1"/>
+                </a:solidFill>
+                <a:latin typeface="Calibri"/>
+                <a:ea typeface="Calibri"/>
+                <a:cs typeface="Calibri"/>
+                <a:sym typeface="Calibri"/>
+              </a:defRPr>
+            </a:lvl2pPr>
+            <a:lvl3pPr marR="0" lvl="2" algn="l" rtl="0">
+              <a:spcBef>
+                <a:spcPts val="0"/>
+              </a:spcBef>
+              <a:spcAft>
+                <a:spcPts val="0"/>
+              </a:spcAft>
+              <a:buSzPts val="1400"/>
+              <a:buNone/>
+              <a:defRPr sz="1800" b="0" i="0" u="none" strike="noStrike" cap="none">
+                <a:solidFill>
+                  <a:schemeClr val="dk1"/>
+                </a:solidFill>
+                <a:latin typeface="Calibri"/>
+                <a:ea typeface="Calibri"/>
+                <a:cs typeface="Calibri"/>
+                <a:sym typeface="Calibri"/>
+              </a:defRPr>
+            </a:lvl3pPr>
+            <a:lvl4pPr marR="0" lvl="3" algn="l" rtl="0">
+              <a:spcBef>
+                <a:spcPts val="0"/>
+              </a:spcBef>
+              <a:spcAft>
+                <a:spcPts val="0"/>
+              </a:spcAft>
+              <a:buSzPts val="1400"/>
+              <a:buNone/>
+              <a:defRPr sz="1800" b="0" i="0" u="none" strike="noStrike" cap="none">
+                <a:solidFill>
+                  <a:schemeClr val="dk1"/>
+                </a:solidFill>
+                <a:latin typeface="Calibri"/>
+                <a:ea typeface="Calibri"/>
+                <a:cs typeface="Calibri"/>
+                <a:sym typeface="Calibri"/>
+              </a:defRPr>
+            </a:lvl4pPr>
+            <a:lvl5pPr marR="0" lvl="4" algn="l" rtl="0">
+              <a:spcBef>
+                <a:spcPts val="0"/>
+              </a:spcBef>
+              <a:spcAft>
+                <a:spcPts val="0"/>
+              </a:spcAft>
+              <a:buSzPts val="1400"/>
+              <a:buNone/>
+              <a:defRPr sz="1800" b="0" i="0" u="none" strike="noStrike" cap="none">
+                <a:solidFill>
+                  <a:schemeClr val="dk1"/>
+                </a:solidFill>
+                <a:latin typeface="Calibri"/>
+                <a:ea typeface="Calibri"/>
+                <a:cs typeface="Calibri"/>
+                <a:sym typeface="Calibri"/>
+              </a:defRPr>
+            </a:lvl5pPr>
+            <a:lvl6pPr marR="0" lvl="5" algn="l" rtl="0">
+              <a:spcBef>
+                <a:spcPts val="0"/>
+              </a:spcBef>
+              <a:spcAft>
+                <a:spcPts val="0"/>
+              </a:spcAft>
+              <a:buSzPts val="1400"/>
+              <a:buNone/>
+              <a:defRPr sz="1800" b="0" i="0" u="none" strike="noStrike" cap="none">
+                <a:solidFill>
+                  <a:schemeClr val="dk1"/>
+                </a:solidFill>
+                <a:latin typeface="Calibri"/>
+                <a:ea typeface="Calibri"/>
+                <a:cs typeface="Calibri"/>
+                <a:sym typeface="Calibri"/>
+              </a:defRPr>
+            </a:lvl6pPr>
+            <a:lvl7pPr marR="0" lvl="6" algn="l" rtl="0">
+              <a:spcBef>
+                <a:spcPts val="0"/>
+              </a:spcBef>
+              <a:spcAft>
+                <a:spcPts val="0"/>
+              </a:spcAft>
+              <a:buSzPts val="1400"/>
+              <a:buNone/>
+              <a:defRPr sz="1800" b="0" i="0" u="none" strike="noStrike" cap="none">
+                <a:solidFill>
+                  <a:schemeClr val="dk1"/>
+                </a:solidFill>
+                <a:latin typeface="Calibri"/>
+                <a:ea typeface="Calibri"/>
+                <a:cs typeface="Calibri"/>
+                <a:sym typeface="Calibri"/>
+              </a:defRPr>
+            </a:lvl7pPr>
+            <a:lvl8pPr marR="0" lvl="7" algn="l" rtl="0">
+              <a:spcBef>
+                <a:spcPts val="0"/>
+              </a:spcBef>
+              <a:spcAft>
+                <a:spcPts val="0"/>
+              </a:spcAft>
+              <a:buSzPts val="1400"/>
+              <a:buNone/>
+              <a:defRPr sz="1800" b="0" i="0" u="none" strike="noStrike" cap="none">
+                <a:solidFill>
+                  <a:schemeClr val="dk1"/>
+                </a:solidFill>
+                <a:latin typeface="Calibri"/>
+                <a:ea typeface="Calibri"/>
+                <a:cs typeface="Calibri"/>
+                <a:sym typeface="Calibri"/>
+              </a:defRPr>
+            </a:lvl8pPr>
+            <a:lvl9pPr marR="0" lvl="8" algn="l" rtl="0">
+              <a:spcBef>
+                <a:spcPts val="0"/>
+              </a:spcBef>
+              <a:spcAft>
+                <a:spcPts val="0"/>
+              </a:spcAft>
+              <a:buSzPts val="1400"/>
+              <a:buNone/>
+              <a:defRPr sz="1800" b="0" i="0" u="none" strike="noStrike" cap="none">
+                <a:solidFill>
+                  <a:schemeClr val="dk1"/>
+                </a:solidFill>
+                <a:latin typeface="Calibri"/>
+                <a:ea typeface="Calibri"/>
+                <a:cs typeface="Calibri"/>
+                <a:sym typeface="Calibri"/>
+              </a:defRPr>
+            </a:lvl9pPr>
+          </a:lstStyle>
+          <a:p>
+            <a:endParaRPr/>
+          </a:p>
+        </p:txBody>
+      </p:sp>
+      <p:sp>
+        <p:nvSpPr>
+          <p:cNvPr id="19" name="Google Shape;19;p2"/>
+          <p:cNvSpPr txBox="1">
+            <a:spLocks noGrp="1"/>
+          </p:cNvSpPr>
+          <p:nvPr>
+            <p:ph type="ftr" idx="11"/>
+          </p:nvPr>
+        </p:nvSpPr>
+        <p:spPr>
+          <a:xfrm>
+            <a:off x="4038600" y="6356350"/>
+            <a:ext cx="4114800" cy="365125"/>
+          </a:xfrm>
+          <a:prstGeom prst="rect">
+            <a:avLst/>
+          </a:prstGeom>
+          <a:noFill/>
+          <a:ln>
+            <a:noFill/>
+          </a:ln>
+        </p:spPr>
+        <p:txBody>
+          <a:bodyPr spcFirstLastPara="1" wrap="square" lIns="91425" tIns="91425" rIns="91425" bIns="91425" anchor="ctr" anchorCtr="0">
+            <a:noAutofit/>
+          </a:bodyPr>
+          <a:lstStyle>
+            <a:lvl1pPr marR="0" lvl="0" algn="ctr" rtl="0">
+              <a:spcBef>
+                <a:spcPts val="0"/>
+              </a:spcBef>
+              <a:spcAft>
+                <a:spcPts val="0"/>
+              </a:spcAft>
+              <a:buSzPts val="1400"/>
+              <a:buNone/>
+              <a:defRPr sz="1200" b="0" i="0" u="none" strike="noStrike" cap="none">
+                <a:solidFill>
+                  <a:srgbClr val="888888"/>
+                </a:solidFill>
+                <a:latin typeface="Calibri"/>
+                <a:ea typeface="Calibri"/>
+                <a:cs typeface="Calibri"/>
+                <a:sym typeface="Calibri"/>
+              </a:defRPr>
+            </a:lvl1pPr>
+            <a:lvl2pPr marR="0" lvl="1" algn="l" rtl="0">
+              <a:spcBef>
+                <a:spcPts val="0"/>
+              </a:spcBef>
+              <a:spcAft>
+                <a:spcPts val="0"/>
+              </a:spcAft>
+              <a:buSzPts val="1400"/>
+              <a:buNone/>
+              <a:defRPr sz="1800" b="0" i="0" u="none" strike="noStrike" cap="none">
+                <a:solidFill>
+                  <a:schemeClr val="dk1"/>
+                </a:solidFill>
+                <a:latin typeface="Calibri"/>
+                <a:ea typeface="Calibri"/>
+                <a:cs typeface="Calibri"/>
+                <a:sym typeface="Calibri"/>
+              </a:defRPr>
+            </a:lvl2pPr>
+            <a:lvl3pPr marR="0" lvl="2" algn="l" rtl="0">
+              <a:spcBef>
+                <a:spcPts val="0"/>
+              </a:spcBef>
+              <a:spcAft>
+                <a:spcPts val="0"/>
+              </a:spcAft>
+              <a:buSzPts val="1400"/>
+              <a:buNone/>
+              <a:defRPr sz="1800" b="0" i="0" u="none" strike="noStrike" cap="none">
+                <a:solidFill>
+                  <a:schemeClr val="dk1"/>
+                </a:solidFill>
+                <a:latin typeface="Calibri"/>
+                <a:ea typeface="Calibri"/>
+                <a:cs typeface="Calibri"/>
+                <a:sym typeface="Calibri"/>
+              </a:defRPr>
+            </a:lvl3pPr>
+            <a:lvl4pPr marR="0" lvl="3" algn="l" rtl="0">
+              <a:spcBef>
+                <a:spcPts val="0"/>
+              </a:spcBef>
+              <a:spcAft>
+                <a:spcPts val="0"/>
+              </a:spcAft>
+              <a:buSzPts val="1400"/>
+              <a:buNone/>
+              <a:defRPr sz="1800" b="0" i="0" u="none" strike="noStrike" cap="none">
+                <a:solidFill>
+                  <a:schemeClr val="dk1"/>
+                </a:solidFill>
+                <a:latin typeface="Calibri"/>
+                <a:ea typeface="Calibri"/>
+                <a:cs typeface="Calibri"/>
+                <a:sym typeface="Calibri"/>
+              </a:defRPr>
+            </a:lvl4pPr>
+            <a:lvl5pPr marR="0" lvl="4" algn="l" rtl="0">
+              <a:spcBef>
+                <a:spcPts val="0"/>
+              </a:spcBef>
+              <a:spcAft>
+                <a:spcPts val="0"/>
+              </a:spcAft>
+              <a:buSzPts val="1400"/>
+              <a:buNone/>
+              <a:defRPr sz="1800" b="0" i="0" u="none" strike="noStrike" cap="none">
+                <a:solidFill>
+                  <a:schemeClr val="dk1"/>
+                </a:solidFill>
+                <a:latin typeface="Calibri"/>
+                <a:ea typeface="Calibri"/>
+                <a:cs typeface="Calibri"/>
+                <a:sym typeface="Calibri"/>
+              </a:defRPr>
+            </a:lvl5pPr>
+            <a:lvl6pPr marR="0" lvl="5" algn="l" rtl="0">
+              <a:spcBef>
+                <a:spcPts val="0"/>
+              </a:spcBef>
+              <a:spcAft>
+                <a:spcPts val="0"/>
+              </a:spcAft>
+              <a:buSzPts val="1400"/>
+              <a:buNone/>
+              <a:defRPr sz="1800" b="0" i="0" u="none" strike="noStrike" cap="none">
+                <a:solidFill>
+                  <a:schemeClr val="dk1"/>
+                </a:solidFill>
+                <a:latin typeface="Calibri"/>
+                <a:ea typeface="Calibri"/>
+                <a:cs typeface="Calibri"/>
+                <a:sym typeface="Calibri"/>
+              </a:defRPr>
+            </a:lvl6pPr>
+            <a:lvl7pPr marR="0" lvl="6" algn="l" rtl="0">
+              <a:spcBef>
+                <a:spcPts val="0"/>
+              </a:spcBef>
+              <a:spcAft>
+                <a:spcPts val="0"/>
+              </a:spcAft>
+              <a:buSzPts val="1400"/>
+              <a:buNone/>
+              <a:defRPr sz="1800" b="0" i="0" u="none" strike="noStrike" cap="none">
+                <a:solidFill>
+                  <a:schemeClr val="dk1"/>
+                </a:solidFill>
+                <a:latin typeface="Calibri"/>
+                <a:ea typeface="Calibri"/>
+                <a:cs typeface="Calibri"/>
+                <a:sym typeface="Calibri"/>
+              </a:defRPr>
+            </a:lvl7pPr>
+            <a:lvl8pPr marR="0" lvl="7" algn="l" rtl="0">
+              <a:spcBef>
+                <a:spcPts val="0"/>
+              </a:spcBef>
+              <a:spcAft>
+                <a:spcPts val="0"/>
+              </a:spcAft>
+              <a:buSzPts val="1400"/>
+              <a:buNone/>
+              <a:defRPr sz="1800" b="0" i="0" u="none" strike="noStrike" cap="none">
+                <a:solidFill>
+                  <a:schemeClr val="dk1"/>
+                </a:solidFill>
+                <a:latin typeface="Calibri"/>
+                <a:ea typeface="Calibri"/>
+                <a:cs typeface="Calibri"/>
+                <a:sym typeface="Calibri"/>
+              </a:defRPr>
+            </a:lvl8pPr>
+            <a:lvl9pPr marR="0" lvl="8" algn="l" rtl="0">
+              <a:spcBef>
+                <a:spcPts val="0"/>
+              </a:spcBef>
+              <a:spcAft>
+                <a:spcPts val="0"/>
+              </a:spcAft>
+              <a:buSzPts val="1400"/>
+              <a:buNone/>
+              <a:defRPr sz="1800" b="0" i="0" u="none" strike="noStrike" cap="none">
+                <a:solidFill>
+                  <a:schemeClr val="dk1"/>
+                </a:solidFill>
+                <a:latin typeface="Calibri"/>
+                <a:ea typeface="Calibri"/>
+                <a:cs typeface="Calibri"/>
+                <a:sym typeface="Calibri"/>
+              </a:defRPr>
+            </a:lvl9pPr>
+          </a:lstStyle>
+          <a:p>
+            <a:endParaRPr/>
+          </a:p>
+        </p:txBody>
+      </p:sp>
+      <p:sp>
+        <p:nvSpPr>
+          <p:cNvPr id="20" name="Google Shape;20;p2"/>
+          <p:cNvSpPr txBox="1">
+            <a:spLocks noGrp="1"/>
+          </p:cNvSpPr>
+          <p:nvPr>
+            <p:ph type="sldNum" idx="12"/>
+          </p:nvPr>
+        </p:nvSpPr>
+        <p:spPr>
+          <a:xfrm>
+            <a:off x="8610600" y="6356350"/>
+            <a:ext cx="2743200" cy="365125"/>
+          </a:xfrm>
+          <a:prstGeom prst="rect">
+            <a:avLst/>
+          </a:prstGeom>
+          <a:noFill/>
+          <a:ln>
+            <a:noFill/>
+          </a:ln>
+        </p:spPr>
+        <p:txBody>
+          <a:bodyPr spcFirstLastPara="1" wrap="square" lIns="91425" tIns="45700" rIns="91425" bIns="45700" anchor="ctr" anchorCtr="0">
+            <a:noAutofit/>
+          </a:bodyPr>
+          <a:lstStyle>
+            <a:lvl1pPr marL="0" marR="0" lvl="0" indent="0" algn="r" rtl="0">
+              <a:spcBef>
+                <a:spcPts val="0"/>
+              </a:spcBef>
+              <a:buNone/>
+              <a:defRPr sz="1200" b="0" i="0" u="none" strike="noStrike" cap="none">
+                <a:solidFill>
+                  <a:srgbClr val="888888"/>
+                </a:solidFill>
+                <a:latin typeface="Calibri"/>
+                <a:ea typeface="Calibri"/>
+                <a:cs typeface="Calibri"/>
+                <a:sym typeface="Calibri"/>
+              </a:defRPr>
+            </a:lvl1pPr>
+            <a:lvl2pPr marL="0" marR="0" lvl="1" indent="0" algn="r" rtl="0">
+              <a:spcBef>
+                <a:spcPts val="0"/>
+              </a:spcBef>
+              <a:buNone/>
+              <a:defRPr sz="1200" b="0" i="0" u="none" strike="noStrike" cap="none">
+                <a:solidFill>
+                  <a:srgbClr val="888888"/>
+                </a:solidFill>
+                <a:latin typeface="Calibri"/>
+                <a:ea typeface="Calibri"/>
+                <a:cs typeface="Calibri"/>
+                <a:sym typeface="Calibri"/>
+              </a:defRPr>
+            </a:lvl2pPr>
+            <a:lvl3pPr marL="0" marR="0" lvl="2" indent="0" algn="r" rtl="0">
+              <a:spcBef>
+                <a:spcPts val="0"/>
+              </a:spcBef>
+              <a:buNone/>
+              <a:defRPr sz="1200" b="0" i="0" u="none" strike="noStrike" cap="none">
+                <a:solidFill>
+                  <a:srgbClr val="888888"/>
+                </a:solidFill>
+                <a:latin typeface="Calibri"/>
+                <a:ea typeface="Calibri"/>
+                <a:cs typeface="Calibri"/>
+                <a:sym typeface="Calibri"/>
+              </a:defRPr>
+            </a:lvl3pPr>
+            <a:lvl4pPr marL="0" marR="0" lvl="3" indent="0" algn="r" rtl="0">
+              <a:spcBef>
+                <a:spcPts val="0"/>
+              </a:spcBef>
+              <a:buNone/>
+              <a:defRPr sz="1200" b="0" i="0" u="none" strike="noStrike" cap="none">
+                <a:solidFill>
+                  <a:srgbClr val="888888"/>
+                </a:solidFill>
+                <a:latin typeface="Calibri"/>
+                <a:ea typeface="Calibri"/>
+                <a:cs typeface="Calibri"/>
+                <a:sym typeface="Calibri"/>
+              </a:defRPr>
+            </a:lvl4pPr>
+            <a:lvl5pPr marL="0" marR="0" lvl="4" indent="0" algn="r" rtl="0">
+              <a:spcBef>
+                <a:spcPts val="0"/>
+              </a:spcBef>
+              <a:buNone/>
+              <a:defRPr sz="1200" b="0" i="0" u="none" strike="noStrike" cap="none">
+                <a:solidFill>
+                  <a:srgbClr val="888888"/>
+                </a:solidFill>
+                <a:latin typeface="Calibri"/>
+                <a:ea typeface="Calibri"/>
+                <a:cs typeface="Calibri"/>
+                <a:sym typeface="Calibri"/>
+              </a:defRPr>
+            </a:lvl5pPr>
+            <a:lvl6pPr marL="0" marR="0" lvl="5" indent="0" algn="r" rtl="0">
+              <a:spcBef>
+                <a:spcPts val="0"/>
+              </a:spcBef>
+              <a:buNone/>
+              <a:defRPr sz="1200" b="0" i="0" u="none" strike="noStrike" cap="none">
+                <a:solidFill>
+                  <a:srgbClr val="888888"/>
+                </a:solidFill>
+                <a:latin typeface="Calibri"/>
+                <a:ea typeface="Calibri"/>
+                <a:cs typeface="Calibri"/>
+                <a:sym typeface="Calibri"/>
+              </a:defRPr>
+            </a:lvl6pPr>
+            <a:lvl7pPr marL="0" marR="0" lvl="6" indent="0" algn="r" rtl="0">
+              <a:spcBef>
+                <a:spcPts val="0"/>
+              </a:spcBef>
+              <a:buNone/>
+              <a:defRPr sz="1200" b="0" i="0" u="none" strike="noStrike" cap="none">
+                <a:solidFill>
+                  <a:srgbClr val="888888"/>
+                </a:solidFill>
+                <a:latin typeface="Calibri"/>
+                <a:ea typeface="Calibri"/>
+                <a:cs typeface="Calibri"/>
+                <a:sym typeface="Calibri"/>
+              </a:defRPr>
+            </a:lvl7pPr>
+            <a:lvl8pPr marL="0" marR="0" lvl="7" indent="0" algn="r" rtl="0">
+              <a:spcBef>
+                <a:spcPts val="0"/>
+              </a:spcBef>
+              <a:buNone/>
+              <a:defRPr sz="1200" b="0" i="0" u="none" strike="noStrike" cap="none">
+                <a:solidFill>
+                  <a:srgbClr val="888888"/>
+                </a:solidFill>
+                <a:latin typeface="Calibri"/>
+                <a:ea typeface="Calibri"/>
+                <a:cs typeface="Calibri"/>
+                <a:sym typeface="Calibri"/>
+              </a:defRPr>
+            </a:lvl8pPr>
+            <a:lvl9pPr marL="0" marR="0" lvl="8" indent="0" algn="r" rtl="0">
+              <a:spcBef>
+                <a:spcPts val="0"/>
+              </a:spcBef>
+              <a:buNone/>
+              <a:defRPr sz="1200" b="0" i="0" u="none" strike="noStrike" cap="none">
+                <a:solidFill>
+                  <a:srgbClr val="888888"/>
+                </a:solidFill>
+                <a:latin typeface="Calibri"/>
+                <a:ea typeface="Calibri"/>
+                <a:cs typeface="Calibri"/>
+                <a:sym typeface="Calibri"/>
+              </a:defRPr>
+            </a:lvl9pPr>
+          </a:lstStyle>
+          <a:p>
+            <a:pPr marL="0" lvl="0" indent="0" algn="r" rtl="0">
+              <a:spcBef>
+                <a:spcPts val="0"/>
+              </a:spcBef>
+              <a:spcAft>
+                <a:spcPts val="0"/>
+              </a:spcAft>
+              <a:buNone/>
+            </a:pPr>
+            <a:fld id="{00000000-1234-1234-1234-123412341234}" type="slidenum">
+              <a:rPr lang="en-US"/>
+              <a:t>‹#›</a:t>
+            </a:fld>
+            <a:endParaRPr/>
+          </a:p>
+        </p:txBody>
+      </p:sp>
+    </p:spTree>
+    <p:extLst>
+      <p:ext uri="{BB962C8B-B14F-4D97-AF65-F5344CB8AC3E}">
+        <p14:creationId xmlns:p14="http://schemas.microsoft.com/office/powerpoint/2010/main" val="613801370"/>
+      </p:ext>
+    </p:extLst>
   </p:cSld>
   <p:clrMapOvr>
     <a:masterClrMapping/>
@@ -11520,6 +12670,7 @@
     <p:sldLayoutId id="2147483656" r:id="rId6"/>
     <p:sldLayoutId id="2147483657" r:id="rId7"/>
     <p:sldLayoutId id="2147483658" r:id="rId8"/>
+    <p:sldLayoutId id="2147483660" r:id="rId9"/>
   </p:sldLayoutIdLst>
   <p:hf sldNum="0" hdr="0" ftr="0" dt="0"/>
   <p:txStyles>
@@ -12364,7 +13515,7 @@
           <a:graphicData uri="http://schemas.openxmlformats.org/presentationml/2006/ole">
             <mc:AlternateContent xmlns:mc="http://schemas.openxmlformats.org/markup-compatibility/2006">
               <mc:Choice xmlns:v="urn:schemas-microsoft-com:vml" Requires="v">
-                <p:oleObj spid="_x0000_s10408" name="Equation" r:id="rId5" imgW="876240" imgH="457200" progId="Equation.DSMT4">
+                <p:oleObj spid="_x0000_s10412" name="Equation" r:id="rId5" imgW="876240" imgH="457200" progId="Equation.DSMT4">
                   <p:embed/>
                 </p:oleObj>
               </mc:Choice>
@@ -16070,6 +17221,1658 @@
     <p:extLst>
       <p:ext uri="{BB962C8B-B14F-4D97-AF65-F5344CB8AC3E}">
         <p14:creationId xmlns:p14="http://schemas.microsoft.com/office/powerpoint/2010/main" val="2030468900"/>
+      </p:ext>
+    </p:extLst>
+  </p:cSld>
+  <p:clrMapOvr>
+    <a:masterClrMapping/>
+  </p:clrMapOvr>
+</p:sld>
+</file>
+
+<file path=ppt/slides/slide6.xml><?xml version="1.0" encoding="utf-8"?>
+<p:sld xmlns:a="http://schemas.openxmlformats.org/drawingml/2006/main" xmlns:r="http://schemas.openxmlformats.org/officeDocument/2006/relationships" xmlns:p="http://schemas.openxmlformats.org/presentationml/2006/main">
+  <p:cSld>
+    <p:spTree>
+      <p:nvGrpSpPr>
+        <p:cNvPr id="1" name=""/>
+        <p:cNvGrpSpPr/>
+        <p:nvPr/>
+      </p:nvGrpSpPr>
+      <p:grpSpPr>
+        <a:xfrm>
+          <a:off x="0" y="0"/>
+          <a:ext cx="0" cy="0"/>
+          <a:chOff x="0" y="0"/>
+          <a:chExt cx="0" cy="0"/>
+        </a:xfrm>
+      </p:grpSpPr>
+      <p:sp>
+        <p:nvSpPr>
+          <p:cNvPr id="7" name="TextBox 6">
+            <a:extLst>
+              <a:ext uri="{FF2B5EF4-FFF2-40B4-BE49-F238E27FC236}">
+                <a16:creationId xmlns:a16="http://schemas.microsoft.com/office/drawing/2014/main" id="{9BA6B30F-33C1-B247-83FA-38C969C91770}"/>
+              </a:ext>
+            </a:extLst>
+          </p:cNvPr>
+          <p:cNvSpPr txBox="1"/>
+          <p:nvPr/>
+        </p:nvSpPr>
+        <p:spPr>
+          <a:xfrm>
+            <a:off x="109728" y="121920"/>
+            <a:ext cx="7522464" cy="954107"/>
+          </a:xfrm>
+          <a:prstGeom prst="rect">
+            <a:avLst/>
+          </a:prstGeom>
+          <a:noFill/>
+        </p:spPr>
+        <p:txBody>
+          <a:bodyPr wrap="square" rtlCol="0">
+            <a:spAutoFit/>
+          </a:bodyPr>
+          <a:lstStyle/>
+          <a:p>
+            <a:r>
+              <a:rPr lang="en-US" sz="2800" b="1" dirty="0"/>
+              <a:t>Multidimensional Linear Regression (MLR)</a:t>
+            </a:r>
+          </a:p>
+          <a:p>
+            <a:r>
+              <a:rPr lang="en-US" sz="2800" b="1" dirty="0"/>
+              <a:t>(a.k.a. Multiple Linear Regression)</a:t>
+            </a:r>
+          </a:p>
+        </p:txBody>
+      </p:sp>
+      <p:pic>
+        <p:nvPicPr>
+          <p:cNvPr id="11266" name="Picture 2" descr="Multiple Linear Regression and Visualization in Python | Pythonic Excursions">
+            <a:extLst>
+              <a:ext uri="{FF2B5EF4-FFF2-40B4-BE49-F238E27FC236}">
+                <a16:creationId xmlns:a16="http://schemas.microsoft.com/office/drawing/2014/main" id="{E97E34B9-790E-8540-BB0C-6F10409081A2}"/>
+              </a:ext>
+            </a:extLst>
+          </p:cNvPr>
+          <p:cNvPicPr>
+            <a:picLocks noChangeAspect="1" noChangeArrowheads="1"/>
+          </p:cNvPicPr>
+          <p:nvPr/>
+        </p:nvPicPr>
+        <p:blipFill>
+          <a:blip r:embed="rId2">
+            <a:extLst>
+              <a:ext uri="{28A0092B-C50C-407E-A947-70E740481C1C}">
+                <a14:useLocalDpi xmlns:a14="http://schemas.microsoft.com/office/drawing/2010/main"/>
+              </a:ext>
+            </a:extLst>
+          </a:blip>
+          <a:srcRect/>
+          <a:stretch>
+            <a:fillRect/>
+          </a:stretch>
+        </p:blipFill>
+        <p:spPr bwMode="auto">
+          <a:xfrm>
+            <a:off x="7808940" y="187452"/>
+            <a:ext cx="4051300" cy="2006600"/>
+          </a:xfrm>
+          <a:prstGeom prst="rect">
+            <a:avLst/>
+          </a:prstGeom>
+          <a:noFill/>
+          <a:extLst>
+            <a:ext uri="{909E8E84-426E-40DD-AFC4-6F175D3DCCD1}">
+              <a14:hiddenFill xmlns:a14="http://schemas.microsoft.com/office/drawing/2010/main">
+                <a:solidFill>
+                  <a:srgbClr val="FFFFFF"/>
+                </a:solidFill>
+              </a14:hiddenFill>
+            </a:ext>
+          </a:extLst>
+        </p:spPr>
+      </p:pic>
+      <p:pic>
+        <p:nvPicPr>
+          <p:cNvPr id="9" name="Picture 8">
+            <a:extLst>
+              <a:ext uri="{FF2B5EF4-FFF2-40B4-BE49-F238E27FC236}">
+                <a16:creationId xmlns:a16="http://schemas.microsoft.com/office/drawing/2014/main" id="{09C4566C-6247-5344-8626-770D30319EE4}"/>
+              </a:ext>
+            </a:extLst>
+          </p:cNvPr>
+          <p:cNvPicPr>
+            <a:picLocks noChangeAspect="1"/>
+          </p:cNvPicPr>
+          <p:nvPr/>
+        </p:nvPicPr>
+        <p:blipFill>
+          <a:blip r:embed="rId3" cstate="email">
+            <a:extLst>
+              <a:ext uri="{28A0092B-C50C-407E-A947-70E740481C1C}">
+                <a14:useLocalDpi xmlns:a14="http://schemas.microsoft.com/office/drawing/2010/main"/>
+              </a:ext>
+            </a:extLst>
+          </a:blip>
+          <a:stretch>
+            <a:fillRect/>
+          </a:stretch>
+        </p:blipFill>
+        <p:spPr>
+          <a:xfrm>
+            <a:off x="852461" y="1190752"/>
+            <a:ext cx="4140200" cy="571500"/>
+          </a:xfrm>
+          <a:prstGeom prst="rect">
+            <a:avLst/>
+          </a:prstGeom>
+        </p:spPr>
+      </p:pic>
+      <p:sp>
+        <p:nvSpPr>
+          <p:cNvPr id="10" name="TextBox 9">
+            <a:extLst>
+              <a:ext uri="{FF2B5EF4-FFF2-40B4-BE49-F238E27FC236}">
+                <a16:creationId xmlns:a16="http://schemas.microsoft.com/office/drawing/2014/main" id="{A3CFBC7E-1D74-114C-9ED5-C112605CF3F2}"/>
+              </a:ext>
+            </a:extLst>
+          </p:cNvPr>
+          <p:cNvSpPr txBox="1"/>
+          <p:nvPr/>
+        </p:nvSpPr>
+        <p:spPr>
+          <a:xfrm>
+            <a:off x="633494" y="1993433"/>
+            <a:ext cx="4943893" cy="1815882"/>
+          </a:xfrm>
+          <a:prstGeom prst="rect">
+            <a:avLst/>
+          </a:prstGeom>
+          <a:noFill/>
+        </p:spPr>
+        <p:txBody>
+          <a:bodyPr wrap="square" rtlCol="0">
+            <a:spAutoFit/>
+          </a:bodyPr>
+          <a:lstStyle/>
+          <a:p>
+            <a:r>
+              <a:rPr lang="en-US" dirty="0"/>
+              <a:t>Some people recommend to preprocess data as following:</a:t>
+            </a:r>
+          </a:p>
+          <a:p>
+            <a:r>
+              <a:rPr lang="en-US" dirty="0"/>
+              <a:t> - center variables to their mean values</a:t>
+            </a:r>
+          </a:p>
+          <a:p>
+            <a:r>
+              <a:rPr lang="en-US" dirty="0"/>
+              <a:t> - scale</a:t>
+            </a:r>
+          </a:p>
+          <a:p>
+            <a:endParaRPr lang="en-US" dirty="0"/>
+          </a:p>
+          <a:p>
+            <a:r>
+              <a:rPr lang="en-US" dirty="0"/>
+              <a:t>Others argue that this doesn't improve the model.</a:t>
+            </a:r>
+          </a:p>
+          <a:p>
+            <a:r>
+              <a:rPr lang="en-US" dirty="0"/>
+              <a:t> - </a:t>
+            </a:r>
+            <a:r>
+              <a:rPr lang="en-US" dirty="0">
+                <a:hlinkClick r:id="rId4"/>
+              </a:rPr>
+              <a:t>https://stats.stackexchange.com/questions/29781/when-conducting-multiple-regression-when-should-you-center-your-predictor-varia</a:t>
+            </a:r>
+            <a:r>
+              <a:rPr lang="en-US" dirty="0"/>
+              <a:t> </a:t>
+            </a:r>
+          </a:p>
+        </p:txBody>
+      </p:sp>
+      <p:sp>
+        <p:nvSpPr>
+          <p:cNvPr id="11" name="TextBox 10">
+            <a:extLst>
+              <a:ext uri="{FF2B5EF4-FFF2-40B4-BE49-F238E27FC236}">
+                <a16:creationId xmlns:a16="http://schemas.microsoft.com/office/drawing/2014/main" id="{71988221-3460-8648-BB3D-D2684F454CB1}"/>
+              </a:ext>
+            </a:extLst>
+          </p:cNvPr>
+          <p:cNvSpPr txBox="1"/>
+          <p:nvPr/>
+        </p:nvSpPr>
+        <p:spPr>
+          <a:xfrm>
+            <a:off x="7044400" y="3429000"/>
+            <a:ext cx="4815840" cy="3108543"/>
+          </a:xfrm>
+          <a:prstGeom prst="rect">
+            <a:avLst/>
+          </a:prstGeom>
+          <a:noFill/>
+        </p:spPr>
+        <p:txBody>
+          <a:bodyPr wrap="square" rtlCol="0">
+            <a:spAutoFit/>
+          </a:bodyPr>
+          <a:lstStyle/>
+          <a:p>
+            <a:r>
+              <a:rPr lang="en-US" b="1" dirty="0">
+                <a:solidFill>
+                  <a:srgbClr val="FF0000"/>
+                </a:solidFill>
+              </a:rPr>
+              <a:t>Another problem - Multicollinearity</a:t>
+            </a:r>
+            <a:r>
+              <a:rPr lang="en-US" dirty="0"/>
+              <a:t> </a:t>
+            </a:r>
+          </a:p>
+          <a:p>
+            <a:endParaRPr lang="en-US" dirty="0"/>
+          </a:p>
+          <a:p>
+            <a:r>
+              <a:rPr lang="en-US" b="1" dirty="0">
+                <a:solidFill>
+                  <a:srgbClr val="FF0000"/>
+                </a:solidFill>
+              </a:rPr>
+              <a:t>Multicollinearity</a:t>
+            </a:r>
+            <a:r>
+              <a:rPr lang="en-US" dirty="0"/>
+              <a:t> - one predictor variable can be linearly predicted from the others with a substantial degree of accuracy.</a:t>
+            </a:r>
+          </a:p>
+          <a:p>
+            <a:endParaRPr lang="en-US" dirty="0"/>
+          </a:p>
+          <a:p>
+            <a:r>
+              <a:rPr lang="en-US" dirty="0"/>
+              <a:t>In this situation, the coefficient estimates of the multiple regression may change erratically in response to small changes in the model or the data. </a:t>
+            </a:r>
+          </a:p>
+          <a:p>
+            <a:endParaRPr lang="en-US" dirty="0"/>
+          </a:p>
+          <a:p>
+            <a:r>
+              <a:rPr lang="en-US" b="1" dirty="0">
+                <a:solidFill>
+                  <a:srgbClr val="FF0000"/>
+                </a:solidFill>
+              </a:rPr>
+              <a:t>Multicollinearity</a:t>
+            </a:r>
+            <a:r>
+              <a:rPr lang="en-US" dirty="0"/>
+              <a:t> does not reduce the predictive power or reliability of the model as a whole, at least within the sample data set; it only affects calculations regarding individual predictors.</a:t>
+            </a:r>
+          </a:p>
+        </p:txBody>
+      </p:sp>
+    </p:spTree>
+    <p:extLst>
+      <p:ext uri="{BB962C8B-B14F-4D97-AF65-F5344CB8AC3E}">
+        <p14:creationId xmlns:p14="http://schemas.microsoft.com/office/powerpoint/2010/main" val="1797589831"/>
+      </p:ext>
+    </p:extLst>
+  </p:cSld>
+  <p:clrMapOvr>
+    <a:masterClrMapping/>
+  </p:clrMapOvr>
+</p:sld>
+</file>
+
+<file path=ppt/slides/slide7.xml><?xml version="1.0" encoding="utf-8"?>
+<p:sld xmlns:a="http://schemas.openxmlformats.org/drawingml/2006/main" xmlns:r="http://schemas.openxmlformats.org/officeDocument/2006/relationships" xmlns:p="http://schemas.openxmlformats.org/presentationml/2006/main">
+  <p:cSld>
+    <p:spTree>
+      <p:nvGrpSpPr>
+        <p:cNvPr id="1" name=""/>
+        <p:cNvGrpSpPr/>
+        <p:nvPr/>
+      </p:nvGrpSpPr>
+      <p:grpSpPr>
+        <a:xfrm>
+          <a:off x="0" y="0"/>
+          <a:ext cx="0" cy="0"/>
+          <a:chOff x="0" y="0"/>
+          <a:chExt cx="0" cy="0"/>
+        </a:xfrm>
+      </p:grpSpPr>
+      <p:sp>
+        <p:nvSpPr>
+          <p:cNvPr id="2" name="TextBox 1">
+            <a:extLst>
+              <a:ext uri="{FF2B5EF4-FFF2-40B4-BE49-F238E27FC236}">
+                <a16:creationId xmlns:a16="http://schemas.microsoft.com/office/drawing/2014/main" id="{81A578F5-0048-3945-B581-5FC45F05D21B}"/>
+              </a:ext>
+            </a:extLst>
+          </p:cNvPr>
+          <p:cNvSpPr txBox="1"/>
+          <p:nvPr/>
+        </p:nvSpPr>
+        <p:spPr>
+          <a:xfrm>
+            <a:off x="256032" y="1047476"/>
+            <a:ext cx="8570976" cy="3108543"/>
+          </a:xfrm>
+          <a:prstGeom prst="rect">
+            <a:avLst/>
+          </a:prstGeom>
+          <a:noFill/>
+        </p:spPr>
+        <p:txBody>
+          <a:bodyPr wrap="square" rtlCol="0">
+            <a:spAutoFit/>
+          </a:bodyPr>
+          <a:lstStyle/>
+          <a:p>
+            <a:pPr marL="285750" indent="-285750">
+              <a:buFont typeface="Arial" panose="020B0604020202020204" pitchFamily="34" charset="0"/>
+              <a:buChar char="•"/>
+            </a:pPr>
+            <a:r>
+              <a:rPr lang="en-US" dirty="0"/>
+              <a:t>Do not add dummy variables which could cause multicollinearity</a:t>
+            </a:r>
+          </a:p>
+          <a:p>
+            <a:pPr marL="285750" indent="-285750">
+              <a:buFont typeface="Arial" panose="020B0604020202020204" pitchFamily="34" charset="0"/>
+              <a:buChar char="•"/>
+            </a:pPr>
+            <a:r>
+              <a:rPr lang="en-US" dirty="0"/>
+              <a:t>Try subsets of training data – watch how stable the coefficients are</a:t>
+            </a:r>
+          </a:p>
+          <a:p>
+            <a:pPr marL="285750" indent="-285750">
+              <a:buFont typeface="Arial" panose="020B0604020202020204" pitchFamily="34" charset="0"/>
+              <a:buChar char="•"/>
+            </a:pPr>
+            <a:r>
+              <a:rPr lang="en-US" dirty="0"/>
+              <a:t>Leave the model as is, despite multicollinearity. It will still work well as a predictor</a:t>
+            </a:r>
+          </a:p>
+          <a:p>
+            <a:pPr marL="285750" indent="-285750">
+              <a:buFont typeface="Arial" panose="020B0604020202020204" pitchFamily="34" charset="0"/>
+              <a:buChar char="•"/>
+            </a:pPr>
+            <a:r>
+              <a:rPr lang="en-US" dirty="0"/>
+              <a:t>Try dropping one of the variables – see if coefficients for others will change</a:t>
+            </a:r>
+          </a:p>
+          <a:p>
+            <a:pPr marL="285750" indent="-285750">
+              <a:buFont typeface="Arial" panose="020B0604020202020204" pitchFamily="34" charset="0"/>
+              <a:buChar char="•"/>
+            </a:pPr>
+            <a:r>
+              <a:rPr lang="en-US" dirty="0"/>
+              <a:t>Get more data – thus get better estimates</a:t>
+            </a:r>
+          </a:p>
+          <a:p>
+            <a:pPr marL="285750" indent="-285750">
+              <a:buFont typeface="Arial" panose="020B0604020202020204" pitchFamily="34" charset="0"/>
+              <a:buChar char="•"/>
+            </a:pPr>
+            <a:r>
+              <a:rPr lang="en-US" dirty="0"/>
+              <a:t>Mean-center the predictor variables. Generating polynomial terms or interaction terms can cause some multicollinearity otherwise</a:t>
+            </a:r>
+          </a:p>
+          <a:p>
+            <a:pPr marL="285750" indent="-285750">
+              <a:buFont typeface="Arial" panose="020B0604020202020204" pitchFamily="34" charset="0"/>
+              <a:buChar char="•"/>
+            </a:pPr>
+            <a:r>
+              <a:rPr lang="en-US" dirty="0"/>
+              <a:t>Standardize your independent variables</a:t>
+            </a:r>
+          </a:p>
+          <a:p>
+            <a:pPr marL="285750" indent="-285750">
+              <a:buFont typeface="Arial" panose="020B0604020202020204" pitchFamily="34" charset="0"/>
+              <a:buChar char="•"/>
+            </a:pPr>
+            <a:r>
+              <a:rPr lang="en-US" dirty="0"/>
+              <a:t>It has also been suggested that using the Shapley value, a game theory tool, the model could account for the effects of multicollinearity</a:t>
+            </a:r>
+          </a:p>
+          <a:p>
+            <a:pPr marL="285750" indent="-285750">
+              <a:buFont typeface="Arial" panose="020B0604020202020204" pitchFamily="34" charset="0"/>
+              <a:buChar char="•"/>
+            </a:pPr>
+            <a:r>
+              <a:rPr lang="en-US" dirty="0"/>
+              <a:t>Ridge regression or principal component regression or partial least squares regression can be used</a:t>
+            </a:r>
+          </a:p>
+          <a:p>
+            <a:pPr marL="285750" indent="-285750">
+              <a:buFont typeface="Arial" panose="020B0604020202020204" pitchFamily="34" charset="0"/>
+              <a:buChar char="•"/>
+            </a:pPr>
+            <a:r>
+              <a:rPr lang="en-US" dirty="0"/>
+              <a:t>If the correlated explanators are different lagged values of the same underlying explanator, </a:t>
+            </a:r>
+            <a:br>
+              <a:rPr lang="en-US" dirty="0"/>
+            </a:br>
+            <a:r>
+              <a:rPr lang="en-US" dirty="0"/>
+              <a:t>then a distributed lag technique can be used, </a:t>
+            </a:r>
+            <a:br>
+              <a:rPr lang="en-US" dirty="0"/>
+            </a:br>
+            <a:r>
+              <a:rPr lang="en-US" dirty="0"/>
+              <a:t>imposing a general structure on the relative values of the coefficients to be estimated</a:t>
+            </a:r>
+          </a:p>
+        </p:txBody>
+      </p:sp>
+      <p:sp>
+        <p:nvSpPr>
+          <p:cNvPr id="8" name="TextBox 7">
+            <a:extLst>
+              <a:ext uri="{FF2B5EF4-FFF2-40B4-BE49-F238E27FC236}">
+                <a16:creationId xmlns:a16="http://schemas.microsoft.com/office/drawing/2014/main" id="{69DBE239-3E71-C048-B7AE-BE26616C3ED5}"/>
+              </a:ext>
+            </a:extLst>
+          </p:cNvPr>
+          <p:cNvSpPr txBox="1"/>
+          <p:nvPr/>
+        </p:nvSpPr>
+        <p:spPr>
+          <a:xfrm>
+            <a:off x="256032" y="97536"/>
+            <a:ext cx="6900672" cy="523220"/>
+          </a:xfrm>
+          <a:prstGeom prst="rect">
+            <a:avLst/>
+          </a:prstGeom>
+          <a:noFill/>
+        </p:spPr>
+        <p:txBody>
+          <a:bodyPr wrap="square" rtlCol="0">
+            <a:spAutoFit/>
+          </a:bodyPr>
+          <a:lstStyle/>
+          <a:p>
+            <a:r>
+              <a:rPr lang="en-US" sz="2800" b="1" dirty="0">
+                <a:solidFill>
+                  <a:schemeClr val="tx1"/>
+                </a:solidFill>
+              </a:rPr>
+              <a:t>Remedies to Multicollinearity problem.</a:t>
+            </a:r>
+          </a:p>
+        </p:txBody>
+      </p:sp>
+    </p:spTree>
+    <p:extLst>
+      <p:ext uri="{BB962C8B-B14F-4D97-AF65-F5344CB8AC3E}">
+        <p14:creationId xmlns:p14="http://schemas.microsoft.com/office/powerpoint/2010/main" val="1457476579"/>
+      </p:ext>
+    </p:extLst>
+  </p:cSld>
+  <p:clrMapOvr>
+    <a:masterClrMapping/>
+  </p:clrMapOvr>
+</p:sld>
+</file>
+
+<file path=ppt/slides/slide8.xml><?xml version="1.0" encoding="utf-8"?>
+<p:sld xmlns:a="http://schemas.openxmlformats.org/drawingml/2006/main" xmlns:r="http://schemas.openxmlformats.org/officeDocument/2006/relationships" xmlns:p="http://schemas.openxmlformats.org/presentationml/2006/main">
+  <p:cSld>
+    <p:spTree>
+      <p:nvGrpSpPr>
+        <p:cNvPr id="1" name="Shape 115"/>
+        <p:cNvGrpSpPr/>
+        <p:nvPr/>
+      </p:nvGrpSpPr>
+      <p:grpSpPr>
+        <a:xfrm>
+          <a:off x="0" y="0"/>
+          <a:ext cx="0" cy="0"/>
+          <a:chOff x="0" y="0"/>
+          <a:chExt cx="0" cy="0"/>
+        </a:xfrm>
+      </p:grpSpPr>
+      <p:sp>
+        <p:nvSpPr>
+          <p:cNvPr id="116" name="Google Shape;116;p17"/>
+          <p:cNvSpPr txBox="1"/>
+          <p:nvPr/>
+        </p:nvSpPr>
+        <p:spPr>
+          <a:xfrm>
+            <a:off x="0" y="0"/>
+            <a:ext cx="7025400" cy="3345300"/>
+          </a:xfrm>
+          <a:prstGeom prst="rect">
+            <a:avLst/>
+          </a:prstGeom>
+          <a:noFill/>
+          <a:ln>
+            <a:noFill/>
+          </a:ln>
+        </p:spPr>
+        <p:txBody>
+          <a:bodyPr spcFirstLastPara="1" wrap="square" lIns="91425" tIns="45700" rIns="91425" bIns="45700" anchor="t" anchorCtr="0">
+            <a:noAutofit/>
+          </a:bodyPr>
+          <a:lstStyle/>
+          <a:p>
+            <a:pPr marL="0" marR="0" lvl="0" indent="0" algn="l" rtl="0">
+              <a:spcBef>
+                <a:spcPts val="0"/>
+              </a:spcBef>
+              <a:spcAft>
+                <a:spcPts val="0"/>
+              </a:spcAft>
+              <a:buNone/>
+            </a:pPr>
+            <a:r>
+              <a:rPr lang="en-US" sz="3200" b="1">
+                <a:solidFill>
+                  <a:schemeClr val="dk1"/>
+                </a:solidFill>
+                <a:latin typeface="Calibri"/>
+                <a:ea typeface="Calibri"/>
+                <a:cs typeface="Calibri"/>
+                <a:sym typeface="Calibri"/>
+              </a:rPr>
+              <a:t>Regression: Ridge, LASSO, Elastic Net</a:t>
+            </a:r>
+            <a:endParaRPr sz="1800">
+              <a:solidFill>
+                <a:schemeClr val="dk1"/>
+              </a:solidFill>
+              <a:latin typeface="Calibri"/>
+              <a:ea typeface="Calibri"/>
+              <a:cs typeface="Calibri"/>
+              <a:sym typeface="Calibri"/>
+            </a:endParaRPr>
+          </a:p>
+          <a:p>
+            <a:pPr marL="0" marR="0" lvl="0" indent="0" algn="l" rtl="0">
+              <a:spcBef>
+                <a:spcPts val="0"/>
+              </a:spcBef>
+              <a:spcAft>
+                <a:spcPts val="0"/>
+              </a:spcAft>
+              <a:buNone/>
+            </a:pPr>
+            <a:endParaRPr>
+              <a:solidFill>
+                <a:schemeClr val="dk1"/>
+              </a:solidFill>
+              <a:latin typeface="Calibri"/>
+              <a:ea typeface="Calibri"/>
+              <a:cs typeface="Calibri"/>
+              <a:sym typeface="Calibri"/>
+            </a:endParaRPr>
+          </a:p>
+          <a:p>
+            <a:pPr marL="0" marR="0" lvl="0" indent="0" algn="l" rtl="0">
+              <a:spcBef>
+                <a:spcPts val="0"/>
+              </a:spcBef>
+              <a:spcAft>
+                <a:spcPts val="0"/>
+              </a:spcAft>
+              <a:buNone/>
+            </a:pPr>
+            <a:r>
+              <a:rPr lang="en-US">
+                <a:solidFill>
+                  <a:schemeClr val="dk1"/>
+                </a:solidFill>
+                <a:latin typeface="Calibri"/>
+                <a:ea typeface="Calibri"/>
+                <a:cs typeface="Calibri"/>
+                <a:sym typeface="Calibri"/>
+              </a:rPr>
+              <a:t>Multivariate (multiple) Linear Regression Regularization.</a:t>
+            </a:r>
+            <a:endParaRPr>
+              <a:solidFill>
+                <a:schemeClr val="dk1"/>
+              </a:solidFill>
+              <a:latin typeface="Calibri"/>
+              <a:ea typeface="Calibri"/>
+              <a:cs typeface="Calibri"/>
+              <a:sym typeface="Calibri"/>
+            </a:endParaRPr>
+          </a:p>
+          <a:p>
+            <a:pPr marL="0" marR="0" lvl="0" indent="0" algn="l" rtl="0">
+              <a:spcBef>
+                <a:spcPts val="0"/>
+              </a:spcBef>
+              <a:spcAft>
+                <a:spcPts val="0"/>
+              </a:spcAft>
+              <a:buNone/>
+            </a:pPr>
+            <a:endParaRPr>
+              <a:solidFill>
+                <a:schemeClr val="dk1"/>
+              </a:solidFill>
+              <a:latin typeface="Calibri"/>
+              <a:ea typeface="Calibri"/>
+              <a:cs typeface="Calibri"/>
+              <a:sym typeface="Calibri"/>
+            </a:endParaRPr>
+          </a:p>
+          <a:p>
+            <a:pPr marL="0" marR="0" lvl="0" indent="0" algn="l" rtl="0">
+              <a:spcBef>
+                <a:spcPts val="0"/>
+              </a:spcBef>
+              <a:spcAft>
+                <a:spcPts val="0"/>
+              </a:spcAft>
+              <a:buNone/>
+            </a:pPr>
+            <a:r>
+              <a:rPr lang="en-US">
+                <a:solidFill>
+                  <a:schemeClr val="dk1"/>
+                </a:solidFill>
+                <a:latin typeface="Calibri"/>
+                <a:ea typeface="Calibri"/>
+                <a:cs typeface="Calibri"/>
+                <a:sym typeface="Calibri"/>
+              </a:rPr>
+              <a:t>Suppose we have a OLS (Ordinary Linear Squared) regression where two parameters x1 &amp; x2 </a:t>
+            </a:r>
+            <a:endParaRPr>
+              <a:solidFill>
+                <a:schemeClr val="dk1"/>
+              </a:solidFill>
+              <a:latin typeface="Calibri"/>
+              <a:ea typeface="Calibri"/>
+              <a:cs typeface="Calibri"/>
+              <a:sym typeface="Calibri"/>
+            </a:endParaRPr>
+          </a:p>
+          <a:p>
+            <a:pPr marL="0" marR="0" lvl="0" indent="0" algn="l" rtl="0">
+              <a:spcBef>
+                <a:spcPts val="0"/>
+              </a:spcBef>
+              <a:spcAft>
+                <a:spcPts val="0"/>
+              </a:spcAft>
+              <a:buNone/>
+            </a:pPr>
+            <a:r>
+              <a:rPr lang="en-US">
+                <a:solidFill>
+                  <a:schemeClr val="dk1"/>
+                </a:solidFill>
+                <a:latin typeface="Calibri"/>
+                <a:ea typeface="Calibri"/>
+                <a:cs typeface="Calibri"/>
+                <a:sym typeface="Calibri"/>
+              </a:rPr>
+              <a:t>are not orthogonal, but in fact highly correlated.</a:t>
+            </a:r>
+            <a:endParaRPr>
+              <a:solidFill>
+                <a:schemeClr val="dk1"/>
+              </a:solidFill>
+              <a:latin typeface="Calibri"/>
+              <a:ea typeface="Calibri"/>
+              <a:cs typeface="Calibri"/>
+              <a:sym typeface="Calibri"/>
+            </a:endParaRPr>
+          </a:p>
+          <a:p>
+            <a:pPr marL="0" marR="0" lvl="0" indent="0" algn="l" rtl="0">
+              <a:spcBef>
+                <a:spcPts val="0"/>
+              </a:spcBef>
+              <a:spcAft>
+                <a:spcPts val="0"/>
+              </a:spcAft>
+              <a:buNone/>
+            </a:pPr>
+            <a:r>
+              <a:rPr lang="en-US">
+                <a:solidFill>
+                  <a:schemeClr val="dk1"/>
+                </a:solidFill>
+                <a:latin typeface="Calibri"/>
+                <a:ea typeface="Calibri"/>
+                <a:cs typeface="Calibri"/>
+                <a:sym typeface="Calibri"/>
+              </a:rPr>
+              <a:t>Then there may be is infinite number of coefficients which will fit the model.</a:t>
+            </a:r>
+            <a:endParaRPr>
+              <a:solidFill>
+                <a:schemeClr val="dk1"/>
+              </a:solidFill>
+              <a:latin typeface="Calibri"/>
+              <a:ea typeface="Calibri"/>
+              <a:cs typeface="Calibri"/>
+              <a:sym typeface="Calibri"/>
+            </a:endParaRPr>
+          </a:p>
+          <a:p>
+            <a:pPr marL="0" marR="0" lvl="0" indent="0" algn="l" rtl="0">
+              <a:spcBef>
+                <a:spcPts val="0"/>
+              </a:spcBef>
+              <a:spcAft>
+                <a:spcPts val="0"/>
+              </a:spcAft>
+              <a:buNone/>
+            </a:pPr>
+            <a:r>
+              <a:rPr lang="en-US">
+                <a:solidFill>
+                  <a:schemeClr val="dk1"/>
+                </a:solidFill>
+                <a:latin typeface="Calibri"/>
+                <a:ea typeface="Calibri"/>
+                <a:cs typeface="Calibri"/>
+                <a:sym typeface="Calibri"/>
+              </a:rPr>
+              <a:t>For example, (x1 - x2), (10*x1 - 10*x2), (100*x1 - 100*x2), etc.</a:t>
+            </a:r>
+            <a:endParaRPr>
+              <a:solidFill>
+                <a:schemeClr val="dk1"/>
+              </a:solidFill>
+              <a:latin typeface="Calibri"/>
+              <a:ea typeface="Calibri"/>
+              <a:cs typeface="Calibri"/>
+              <a:sym typeface="Calibri"/>
+            </a:endParaRPr>
+          </a:p>
+          <a:p>
+            <a:pPr marL="0" marR="0" lvl="0" indent="0" algn="l" rtl="0">
+              <a:spcBef>
+                <a:spcPts val="0"/>
+              </a:spcBef>
+              <a:spcAft>
+                <a:spcPts val="0"/>
+              </a:spcAft>
+              <a:buNone/>
+            </a:pPr>
+            <a:r>
+              <a:rPr lang="en-US">
+                <a:solidFill>
+                  <a:schemeClr val="dk1"/>
+                </a:solidFill>
+                <a:latin typeface="Calibri"/>
+                <a:ea typeface="Calibri"/>
+                <a:cs typeface="Calibri"/>
+                <a:sym typeface="Calibri"/>
+              </a:rPr>
+              <a:t>If we are trying to minimize the cost function in the multidimensional </a:t>
+            </a:r>
+            <a:endParaRPr>
+              <a:solidFill>
+                <a:schemeClr val="dk1"/>
+              </a:solidFill>
+              <a:latin typeface="Calibri"/>
+              <a:ea typeface="Calibri"/>
+              <a:cs typeface="Calibri"/>
+              <a:sym typeface="Calibri"/>
+            </a:endParaRPr>
+          </a:p>
+          <a:p>
+            <a:pPr marL="0" marR="0" lvl="0" indent="0" algn="l" rtl="0">
+              <a:spcBef>
+                <a:spcPts val="0"/>
+              </a:spcBef>
+              <a:spcAft>
+                <a:spcPts val="0"/>
+              </a:spcAft>
+              <a:buNone/>
+            </a:pPr>
+            <a:r>
+              <a:rPr lang="en-US">
+                <a:solidFill>
+                  <a:schemeClr val="dk1"/>
+                </a:solidFill>
+                <a:latin typeface="Calibri"/>
+                <a:ea typeface="Calibri"/>
+                <a:cs typeface="Calibri"/>
+                <a:sym typeface="Calibri"/>
+              </a:rPr>
+              <a:t>space of coefficients, we will get an infinite diagonal groove (ridge) for x1=x2.</a:t>
+            </a:r>
+            <a:endParaRPr>
+              <a:solidFill>
+                <a:schemeClr val="dk1"/>
+              </a:solidFill>
+              <a:latin typeface="Calibri"/>
+              <a:ea typeface="Calibri"/>
+              <a:cs typeface="Calibri"/>
+              <a:sym typeface="Calibri"/>
+            </a:endParaRPr>
+          </a:p>
+          <a:p>
+            <a:pPr marL="0" marR="0" lvl="0" indent="0" algn="l" rtl="0">
+              <a:spcBef>
+                <a:spcPts val="0"/>
+              </a:spcBef>
+              <a:spcAft>
+                <a:spcPts val="0"/>
+              </a:spcAft>
+              <a:buNone/>
+            </a:pPr>
+            <a:r>
+              <a:rPr lang="en-US">
+                <a:solidFill>
+                  <a:schemeClr val="dk1"/>
+                </a:solidFill>
+                <a:latin typeface="Calibri"/>
+                <a:ea typeface="Calibri"/>
+                <a:cs typeface="Calibri"/>
+                <a:sym typeface="Calibri"/>
+              </a:rPr>
+              <a:t>Any place at the bottom of this ridge is equally good for us.</a:t>
+            </a:r>
+            <a:endParaRPr>
+              <a:solidFill>
+                <a:schemeClr val="dk1"/>
+              </a:solidFill>
+              <a:latin typeface="Calibri"/>
+              <a:ea typeface="Calibri"/>
+              <a:cs typeface="Calibri"/>
+              <a:sym typeface="Calibri"/>
+            </a:endParaRPr>
+          </a:p>
+          <a:p>
+            <a:pPr marL="0" marR="0" lvl="0" indent="0" algn="l" rtl="0">
+              <a:spcBef>
+                <a:spcPts val="0"/>
+              </a:spcBef>
+              <a:spcAft>
+                <a:spcPts val="0"/>
+              </a:spcAft>
+              <a:buNone/>
+            </a:pPr>
+            <a:r>
+              <a:rPr lang="en-US">
+                <a:solidFill>
+                  <a:schemeClr val="dk1"/>
+                </a:solidFill>
+                <a:latin typeface="Calibri"/>
+                <a:ea typeface="Calibri"/>
+                <a:cs typeface="Calibri"/>
+                <a:sym typeface="Calibri"/>
+              </a:rPr>
+              <a:t>So we will get a big variability in possible values of coefficients for x1 &amp; x2.</a:t>
+            </a:r>
+            <a:endParaRPr>
+              <a:solidFill>
+                <a:schemeClr val="dk1"/>
+              </a:solidFill>
+              <a:latin typeface="Calibri"/>
+              <a:ea typeface="Calibri"/>
+              <a:cs typeface="Calibri"/>
+              <a:sym typeface="Calibri"/>
+            </a:endParaRPr>
+          </a:p>
+          <a:p>
+            <a:pPr marL="0" marR="0" lvl="0" indent="0" algn="l" rtl="0">
+              <a:spcBef>
+                <a:spcPts val="0"/>
+              </a:spcBef>
+              <a:spcAft>
+                <a:spcPts val="0"/>
+              </a:spcAft>
+              <a:buNone/>
+            </a:pPr>
+            <a:r>
+              <a:rPr lang="en-US">
+                <a:solidFill>
+                  <a:schemeClr val="dk1"/>
+                </a:solidFill>
+                <a:latin typeface="Calibri"/>
+                <a:ea typeface="Calibri"/>
+                <a:cs typeface="Calibri"/>
+                <a:sym typeface="Calibri"/>
+              </a:rPr>
+              <a:t>The solution will be unstable.</a:t>
+            </a:r>
+            <a:endParaRPr>
+              <a:solidFill>
+                <a:schemeClr val="dk1"/>
+              </a:solidFill>
+              <a:latin typeface="Calibri"/>
+              <a:ea typeface="Calibri"/>
+              <a:cs typeface="Calibri"/>
+              <a:sym typeface="Calibri"/>
+            </a:endParaRPr>
+          </a:p>
+          <a:p>
+            <a:pPr marL="0" marR="0" lvl="0" indent="0" algn="l" rtl="0">
+              <a:spcBef>
+                <a:spcPts val="0"/>
+              </a:spcBef>
+              <a:spcAft>
+                <a:spcPts val="0"/>
+              </a:spcAft>
+              <a:buNone/>
+            </a:pPr>
+            <a:r>
+              <a:rPr lang="en-US">
+                <a:solidFill>
+                  <a:schemeClr val="dk1"/>
+                </a:solidFill>
+                <a:latin typeface="Calibri"/>
+                <a:ea typeface="Calibri"/>
+                <a:cs typeface="Calibri"/>
+                <a:sym typeface="Calibri"/>
+              </a:rPr>
+              <a:t>We can reduce this variability by adding additional regularization factor like this:</a:t>
+            </a:r>
+            <a:endParaRPr>
+              <a:solidFill>
+                <a:schemeClr val="dk1"/>
+              </a:solidFill>
+              <a:latin typeface="Calibri"/>
+              <a:ea typeface="Calibri"/>
+              <a:cs typeface="Calibri"/>
+              <a:sym typeface="Calibri"/>
+            </a:endParaRPr>
+          </a:p>
+          <a:p>
+            <a:pPr marL="0" marR="0" lvl="0" indent="0" algn="l" rtl="0">
+              <a:spcBef>
+                <a:spcPts val="0"/>
+              </a:spcBef>
+              <a:spcAft>
+                <a:spcPts val="0"/>
+              </a:spcAft>
+              <a:buNone/>
+            </a:pPr>
+            <a:endParaRPr>
+              <a:solidFill>
+                <a:schemeClr val="dk1"/>
+              </a:solidFill>
+              <a:latin typeface="Calibri"/>
+              <a:ea typeface="Calibri"/>
+              <a:cs typeface="Calibri"/>
+              <a:sym typeface="Calibri"/>
+            </a:endParaRPr>
+          </a:p>
+        </p:txBody>
+      </p:sp>
+      <p:pic>
+        <p:nvPicPr>
+          <p:cNvPr id="117" name="Google Shape;117;p17"/>
+          <p:cNvPicPr preferRelativeResize="0"/>
+          <p:nvPr/>
+        </p:nvPicPr>
+        <p:blipFill>
+          <a:blip r:embed="rId3" cstate="email">
+            <a:alphaModFix/>
+            <a:extLst>
+              <a:ext uri="{28A0092B-C50C-407E-A947-70E740481C1C}">
+                <a14:useLocalDpi xmlns:a14="http://schemas.microsoft.com/office/drawing/2010/main"/>
+              </a:ext>
+            </a:extLst>
+          </a:blip>
+          <a:stretch>
+            <a:fillRect/>
+          </a:stretch>
+        </p:blipFill>
+        <p:spPr>
+          <a:xfrm>
+            <a:off x="7768703" y="4231125"/>
+            <a:ext cx="3549800" cy="1810400"/>
+          </a:xfrm>
+          <a:prstGeom prst="rect">
+            <a:avLst/>
+          </a:prstGeom>
+          <a:noFill/>
+          <a:ln>
+            <a:noFill/>
+          </a:ln>
+        </p:spPr>
+      </p:pic>
+      <p:pic>
+        <p:nvPicPr>
+          <p:cNvPr id="118" name="Google Shape;118;p17"/>
+          <p:cNvPicPr preferRelativeResize="0"/>
+          <p:nvPr/>
+        </p:nvPicPr>
+        <p:blipFill>
+          <a:blip r:embed="rId4" cstate="email">
+            <a:alphaModFix/>
+            <a:extLst>
+              <a:ext uri="{28A0092B-C50C-407E-A947-70E740481C1C}">
+                <a14:useLocalDpi xmlns:a14="http://schemas.microsoft.com/office/drawing/2010/main"/>
+              </a:ext>
+            </a:extLst>
+          </a:blip>
+          <a:stretch>
+            <a:fillRect/>
+          </a:stretch>
+        </p:blipFill>
+        <p:spPr>
+          <a:xfrm>
+            <a:off x="6895201" y="223025"/>
+            <a:ext cx="5296801" cy="2665060"/>
+          </a:xfrm>
+          <a:prstGeom prst="rect">
+            <a:avLst/>
+          </a:prstGeom>
+          <a:noFill/>
+          <a:ln>
+            <a:noFill/>
+          </a:ln>
+        </p:spPr>
+      </p:pic>
+      <p:pic>
+        <p:nvPicPr>
+          <p:cNvPr id="119" name="Google Shape;119;p17"/>
+          <p:cNvPicPr preferRelativeResize="0"/>
+          <p:nvPr/>
+        </p:nvPicPr>
+        <p:blipFill>
+          <a:blip r:embed="rId5">
+            <a:alphaModFix/>
+          </a:blip>
+          <a:stretch>
+            <a:fillRect/>
+          </a:stretch>
+        </p:blipFill>
+        <p:spPr>
+          <a:xfrm>
+            <a:off x="390275" y="3345300"/>
+            <a:ext cx="5267325" cy="885825"/>
+          </a:xfrm>
+          <a:prstGeom prst="rect">
+            <a:avLst/>
+          </a:prstGeom>
+          <a:noFill/>
+          <a:ln>
+            <a:noFill/>
+          </a:ln>
+        </p:spPr>
+      </p:pic>
+      <p:sp>
+        <p:nvSpPr>
+          <p:cNvPr id="120" name="Google Shape;120;p17"/>
+          <p:cNvSpPr txBox="1"/>
+          <p:nvPr/>
+        </p:nvSpPr>
+        <p:spPr>
+          <a:xfrm>
+            <a:off x="0" y="4231125"/>
+            <a:ext cx="7025400" cy="2664900"/>
+          </a:xfrm>
+          <a:prstGeom prst="rect">
+            <a:avLst/>
+          </a:prstGeom>
+          <a:noFill/>
+          <a:ln>
+            <a:noFill/>
+          </a:ln>
+        </p:spPr>
+        <p:txBody>
+          <a:bodyPr spcFirstLastPara="1" wrap="square" lIns="91425" tIns="91425" rIns="91425" bIns="91425" anchor="t" anchorCtr="0">
+            <a:noAutofit/>
+          </a:bodyPr>
+          <a:lstStyle/>
+          <a:p>
+            <a:pPr marL="0" lvl="0" indent="0" algn="l" rtl="0">
+              <a:spcBef>
+                <a:spcPts val="0"/>
+              </a:spcBef>
+              <a:spcAft>
+                <a:spcPts val="0"/>
+              </a:spcAft>
+              <a:buNone/>
+            </a:pPr>
+            <a:r>
+              <a:rPr lang="en-US">
+                <a:solidFill>
+                  <a:schemeClr val="dk1"/>
+                </a:solidFill>
+                <a:latin typeface="Calibri"/>
+                <a:ea typeface="Calibri"/>
+                <a:cs typeface="Calibri"/>
+                <a:sym typeface="Calibri"/>
+              </a:rPr>
+              <a:t>When we minimizing this expression, bigger  "lambda" value will cause smaller "beta" values, thus keeping the coefficients "beta" from becoming too large. </a:t>
+            </a:r>
+            <a:endParaRPr>
+              <a:solidFill>
+                <a:schemeClr val="dk1"/>
+              </a:solidFill>
+              <a:latin typeface="Calibri"/>
+              <a:ea typeface="Calibri"/>
+              <a:cs typeface="Calibri"/>
+              <a:sym typeface="Calibri"/>
+            </a:endParaRPr>
+          </a:p>
+          <a:p>
+            <a:pPr marL="0" lvl="0" indent="0" algn="l" rtl="0">
+              <a:spcBef>
+                <a:spcPts val="0"/>
+              </a:spcBef>
+              <a:spcAft>
+                <a:spcPts val="0"/>
+              </a:spcAft>
+              <a:buNone/>
+            </a:pPr>
+            <a:r>
+              <a:rPr lang="en-US">
+                <a:solidFill>
+                  <a:schemeClr val="dk1"/>
+                </a:solidFill>
+                <a:latin typeface="Calibri"/>
+                <a:ea typeface="Calibri"/>
+                <a:cs typeface="Calibri"/>
+                <a:sym typeface="Calibri"/>
+              </a:rPr>
+              <a:t>This is called "</a:t>
+            </a:r>
+            <a:r>
+              <a:rPr lang="en-US" b="1">
+                <a:solidFill>
+                  <a:srgbClr val="0000FF"/>
+                </a:solidFill>
+                <a:latin typeface="Calibri"/>
+                <a:ea typeface="Calibri"/>
+                <a:cs typeface="Calibri"/>
+                <a:sym typeface="Calibri"/>
+              </a:rPr>
+              <a:t>Ridge Regression</a:t>
+            </a:r>
+            <a:r>
+              <a:rPr lang="en-US">
+                <a:solidFill>
+                  <a:schemeClr val="dk1"/>
+                </a:solidFill>
+                <a:latin typeface="Calibri"/>
+                <a:ea typeface="Calibri"/>
+                <a:cs typeface="Calibri"/>
+                <a:sym typeface="Calibri"/>
+              </a:rPr>
+              <a:t>". It changes the infinitely long ridge into a local minimum.</a:t>
+            </a:r>
+            <a:endParaRPr>
+              <a:solidFill>
+                <a:schemeClr val="dk1"/>
+              </a:solidFill>
+              <a:latin typeface="Calibri"/>
+              <a:ea typeface="Calibri"/>
+              <a:cs typeface="Calibri"/>
+              <a:sym typeface="Calibri"/>
+            </a:endParaRPr>
+          </a:p>
+          <a:p>
+            <a:pPr marL="0" lvl="0" indent="0" algn="l" rtl="0">
+              <a:spcBef>
+                <a:spcPts val="0"/>
+              </a:spcBef>
+              <a:spcAft>
+                <a:spcPts val="0"/>
+              </a:spcAft>
+              <a:buNone/>
+            </a:pPr>
+            <a:endParaRPr>
+              <a:solidFill>
+                <a:schemeClr val="dk1"/>
+              </a:solidFill>
+              <a:latin typeface="Calibri"/>
+              <a:ea typeface="Calibri"/>
+              <a:cs typeface="Calibri"/>
+              <a:sym typeface="Calibri"/>
+            </a:endParaRPr>
+          </a:p>
+          <a:p>
+            <a:pPr marL="0" lvl="0" indent="0" algn="l" rtl="0">
+              <a:spcBef>
+                <a:spcPts val="0"/>
+              </a:spcBef>
+              <a:spcAft>
+                <a:spcPts val="0"/>
+              </a:spcAft>
+              <a:buNone/>
+            </a:pPr>
+            <a:r>
+              <a:rPr lang="en-US">
+                <a:solidFill>
+                  <a:schemeClr val="dk1"/>
+                </a:solidFill>
+                <a:latin typeface="Calibri"/>
+                <a:ea typeface="Calibri"/>
+                <a:cs typeface="Calibri"/>
+                <a:sym typeface="Calibri"/>
+              </a:rPr>
+              <a:t>In </a:t>
+            </a:r>
+            <a:r>
+              <a:rPr lang="en-US" b="1">
+                <a:solidFill>
+                  <a:srgbClr val="0000FF"/>
+                </a:solidFill>
+                <a:latin typeface="Calibri"/>
+                <a:ea typeface="Calibri"/>
+                <a:cs typeface="Calibri"/>
+                <a:sym typeface="Calibri"/>
+              </a:rPr>
+              <a:t>Ridge Regression</a:t>
+            </a:r>
+            <a:r>
+              <a:rPr lang="en-US">
+                <a:solidFill>
+                  <a:schemeClr val="dk1"/>
+                </a:solidFill>
+                <a:latin typeface="Calibri"/>
+                <a:ea typeface="Calibri"/>
+                <a:cs typeface="Calibri"/>
+                <a:sym typeface="Calibri"/>
+              </a:rPr>
+              <a:t> we add a "</a:t>
+            </a:r>
+            <a:r>
+              <a:rPr lang="en-US" b="1">
+                <a:solidFill>
+                  <a:srgbClr val="0000FF"/>
+                </a:solidFill>
+                <a:latin typeface="Calibri"/>
+                <a:ea typeface="Calibri"/>
+                <a:cs typeface="Calibri"/>
+                <a:sym typeface="Calibri"/>
+              </a:rPr>
+              <a:t>regularization</a:t>
+            </a:r>
+            <a:r>
+              <a:rPr lang="en-US">
+                <a:solidFill>
+                  <a:schemeClr val="dk1"/>
+                </a:solidFill>
+                <a:latin typeface="Calibri"/>
+                <a:ea typeface="Calibri"/>
+                <a:cs typeface="Calibri"/>
+                <a:sym typeface="Calibri"/>
+              </a:rPr>
+              <a:t>" term as sum of squares (</a:t>
+            </a:r>
+            <a:r>
+              <a:rPr lang="en-US" b="1">
+                <a:solidFill>
+                  <a:srgbClr val="0000FF"/>
+                </a:solidFill>
+                <a:latin typeface="Calibri"/>
+                <a:ea typeface="Calibri"/>
+                <a:cs typeface="Calibri"/>
+                <a:sym typeface="Calibri"/>
+              </a:rPr>
+              <a:t>L2 norm</a:t>
+            </a:r>
+            <a:r>
+              <a:rPr lang="en-US">
+                <a:solidFill>
+                  <a:schemeClr val="dk1"/>
+                </a:solidFill>
+                <a:latin typeface="Calibri"/>
+                <a:ea typeface="Calibri"/>
+                <a:cs typeface="Calibri"/>
+                <a:sym typeface="Calibri"/>
+              </a:rPr>
+              <a:t>).</a:t>
+            </a:r>
+            <a:endParaRPr>
+              <a:solidFill>
+                <a:schemeClr val="dk1"/>
+              </a:solidFill>
+              <a:latin typeface="Calibri"/>
+              <a:ea typeface="Calibri"/>
+              <a:cs typeface="Calibri"/>
+              <a:sym typeface="Calibri"/>
+            </a:endParaRPr>
+          </a:p>
+          <a:p>
+            <a:pPr marL="0" lvl="0" indent="0" algn="l" rtl="0">
+              <a:spcBef>
+                <a:spcPts val="0"/>
+              </a:spcBef>
+              <a:spcAft>
+                <a:spcPts val="0"/>
+              </a:spcAft>
+              <a:buNone/>
+            </a:pPr>
+            <a:r>
+              <a:rPr lang="en-US">
+                <a:solidFill>
+                  <a:schemeClr val="dk1"/>
+                </a:solidFill>
+                <a:latin typeface="Calibri"/>
+                <a:ea typeface="Calibri"/>
+                <a:cs typeface="Calibri"/>
+                <a:sym typeface="Calibri"/>
+              </a:rPr>
+              <a:t>If instead we use </a:t>
+            </a:r>
+            <a:r>
+              <a:rPr lang="en-US" b="1">
+                <a:solidFill>
+                  <a:srgbClr val="0000FF"/>
+                </a:solidFill>
+                <a:latin typeface="Calibri"/>
+                <a:ea typeface="Calibri"/>
+                <a:cs typeface="Calibri"/>
+                <a:sym typeface="Calibri"/>
+              </a:rPr>
+              <a:t>L1 norm</a:t>
+            </a:r>
+            <a:r>
+              <a:rPr lang="en-US">
+                <a:solidFill>
+                  <a:schemeClr val="dk1"/>
+                </a:solidFill>
+                <a:latin typeface="Calibri"/>
+                <a:ea typeface="Calibri"/>
+                <a:cs typeface="Calibri"/>
+                <a:sym typeface="Calibri"/>
+              </a:rPr>
+              <a:t> (sum of abs values) - it is called "LASSO Regression",</a:t>
+            </a:r>
+            <a:endParaRPr>
+              <a:solidFill>
+                <a:schemeClr val="dk1"/>
+              </a:solidFill>
+              <a:latin typeface="Calibri"/>
+              <a:ea typeface="Calibri"/>
+              <a:cs typeface="Calibri"/>
+              <a:sym typeface="Calibri"/>
+            </a:endParaRPr>
+          </a:p>
+          <a:p>
+            <a:pPr marL="0" lvl="0" indent="0" algn="l" rtl="0">
+              <a:spcBef>
+                <a:spcPts val="0"/>
+              </a:spcBef>
+              <a:spcAft>
+                <a:spcPts val="0"/>
+              </a:spcAft>
+              <a:buNone/>
+            </a:pPr>
+            <a:r>
+              <a:rPr lang="en-US">
+                <a:solidFill>
+                  <a:schemeClr val="dk1"/>
+                </a:solidFill>
+                <a:latin typeface="Calibri"/>
+                <a:ea typeface="Calibri"/>
+                <a:cs typeface="Calibri"/>
+                <a:sym typeface="Calibri"/>
+              </a:rPr>
+              <a:t>where </a:t>
+            </a:r>
+            <a:r>
+              <a:rPr lang="en-US" b="1">
+                <a:solidFill>
+                  <a:srgbClr val="0000FF"/>
+                </a:solidFill>
+                <a:latin typeface="Calibri"/>
+                <a:ea typeface="Calibri"/>
+                <a:cs typeface="Calibri"/>
+                <a:sym typeface="Calibri"/>
+              </a:rPr>
+              <a:t>LASSO = Least Absolute Shrinkage and Selection Operator</a:t>
+            </a:r>
+            <a:r>
+              <a:rPr lang="en-US">
+                <a:solidFill>
+                  <a:schemeClr val="dk1"/>
+                </a:solidFill>
+                <a:latin typeface="Calibri"/>
+                <a:ea typeface="Calibri"/>
+                <a:cs typeface="Calibri"/>
+                <a:sym typeface="Calibri"/>
+              </a:rPr>
+              <a:t>.</a:t>
+            </a:r>
+            <a:endParaRPr>
+              <a:solidFill>
+                <a:schemeClr val="dk1"/>
+              </a:solidFill>
+              <a:latin typeface="Calibri"/>
+              <a:ea typeface="Calibri"/>
+              <a:cs typeface="Calibri"/>
+              <a:sym typeface="Calibri"/>
+            </a:endParaRPr>
+          </a:p>
+          <a:p>
+            <a:pPr marL="0" lvl="0" indent="0" algn="l" rtl="0">
+              <a:spcBef>
+                <a:spcPts val="0"/>
+              </a:spcBef>
+              <a:spcAft>
+                <a:spcPts val="0"/>
+              </a:spcAft>
+              <a:buNone/>
+            </a:pPr>
+            <a:r>
+              <a:rPr lang="en-US">
+                <a:solidFill>
+                  <a:schemeClr val="dk1"/>
+                </a:solidFill>
+                <a:latin typeface="Calibri"/>
+                <a:ea typeface="Calibri"/>
+                <a:cs typeface="Calibri"/>
+                <a:sym typeface="Calibri"/>
+              </a:rPr>
+              <a:t>LASSO favors solutions on the tips of the bounding surface for coefficients, where some of coefficients are zero. Thus it favors "sparse" solutions.</a:t>
+            </a:r>
+            <a:endParaRPr>
+              <a:solidFill>
+                <a:schemeClr val="dk1"/>
+              </a:solidFill>
+              <a:latin typeface="Calibri"/>
+              <a:ea typeface="Calibri"/>
+              <a:cs typeface="Calibri"/>
+              <a:sym typeface="Calibri"/>
+            </a:endParaRPr>
+          </a:p>
+          <a:p>
+            <a:pPr marL="0" lvl="0" indent="0" algn="l" rtl="0">
+              <a:spcBef>
+                <a:spcPts val="0"/>
+              </a:spcBef>
+              <a:spcAft>
+                <a:spcPts val="0"/>
+              </a:spcAft>
+              <a:buNone/>
+            </a:pPr>
+            <a:endParaRPr>
+              <a:solidFill>
+                <a:schemeClr val="dk1"/>
+              </a:solidFill>
+              <a:latin typeface="Calibri"/>
+              <a:ea typeface="Calibri"/>
+              <a:cs typeface="Calibri"/>
+              <a:sym typeface="Calibri"/>
+            </a:endParaRPr>
+          </a:p>
+          <a:p>
+            <a:pPr marL="0" lvl="0" indent="0" algn="l" rtl="0">
+              <a:spcBef>
+                <a:spcPts val="0"/>
+              </a:spcBef>
+              <a:spcAft>
+                <a:spcPts val="0"/>
+              </a:spcAft>
+              <a:buNone/>
+            </a:pPr>
+            <a:r>
+              <a:rPr lang="en-US">
+                <a:solidFill>
+                  <a:schemeClr val="dk1"/>
+                </a:solidFill>
+                <a:latin typeface="Calibri"/>
+                <a:ea typeface="Calibri"/>
+                <a:cs typeface="Calibri"/>
+                <a:sym typeface="Calibri"/>
+              </a:rPr>
+              <a:t>A combination of Ridge Regression and LASSO Regression is called "</a:t>
+            </a:r>
+            <a:r>
+              <a:rPr lang="en-US" b="1">
+                <a:solidFill>
+                  <a:srgbClr val="0000FF"/>
+                </a:solidFill>
+                <a:latin typeface="Calibri"/>
+                <a:ea typeface="Calibri"/>
+                <a:cs typeface="Calibri"/>
+                <a:sym typeface="Calibri"/>
+              </a:rPr>
+              <a:t>Elastic Net</a:t>
+            </a:r>
+            <a:r>
+              <a:rPr lang="en-US">
+                <a:solidFill>
+                  <a:schemeClr val="dk1"/>
+                </a:solidFill>
+                <a:latin typeface="Calibri"/>
+                <a:ea typeface="Calibri"/>
+                <a:cs typeface="Calibri"/>
+                <a:sym typeface="Calibri"/>
+              </a:rPr>
+              <a:t>"</a:t>
+            </a:r>
+            <a:endParaRPr/>
+          </a:p>
+        </p:txBody>
+      </p:sp>
+      <p:sp>
+        <p:nvSpPr>
+          <p:cNvPr id="121" name="Google Shape;121;p17"/>
+          <p:cNvSpPr txBox="1"/>
+          <p:nvPr/>
+        </p:nvSpPr>
+        <p:spPr>
+          <a:xfrm>
+            <a:off x="7090350" y="3025700"/>
+            <a:ext cx="4906500" cy="501900"/>
+          </a:xfrm>
+          <a:prstGeom prst="rect">
+            <a:avLst/>
+          </a:prstGeom>
+          <a:noFill/>
+          <a:ln>
+            <a:noFill/>
+          </a:ln>
+        </p:spPr>
+        <p:txBody>
+          <a:bodyPr spcFirstLastPara="1" wrap="square" lIns="91425" tIns="91425" rIns="91425" bIns="91425" anchor="t" anchorCtr="0">
+            <a:noAutofit/>
+          </a:bodyPr>
+          <a:lstStyle/>
+          <a:p>
+            <a:pPr marL="0" lvl="0" indent="0" algn="l" rtl="0">
+              <a:spcBef>
+                <a:spcPts val="0"/>
+              </a:spcBef>
+              <a:spcAft>
+                <a:spcPts val="0"/>
+              </a:spcAft>
+              <a:buNone/>
+            </a:pPr>
+            <a:r>
+              <a:rPr lang="en-US"/>
+              <a:t>Why Ridge Regression is called Ridge ...</a:t>
+            </a:r>
+            <a:endParaRPr/>
+          </a:p>
+        </p:txBody>
+      </p:sp>
+      <p:sp>
+        <p:nvSpPr>
+          <p:cNvPr id="122" name="Google Shape;122;p17"/>
+          <p:cNvSpPr txBox="1"/>
+          <p:nvPr/>
+        </p:nvSpPr>
+        <p:spPr>
+          <a:xfrm>
+            <a:off x="7173950" y="6151750"/>
+            <a:ext cx="4906500" cy="501900"/>
+          </a:xfrm>
+          <a:prstGeom prst="rect">
+            <a:avLst/>
+          </a:prstGeom>
+          <a:noFill/>
+          <a:ln>
+            <a:noFill/>
+          </a:ln>
+        </p:spPr>
+        <p:txBody>
+          <a:bodyPr spcFirstLastPara="1" wrap="square" lIns="91425" tIns="91425" rIns="91425" bIns="91425" anchor="t" anchorCtr="0">
+            <a:noAutofit/>
+          </a:bodyPr>
+          <a:lstStyle/>
+          <a:p>
+            <a:pPr marL="0" lvl="0" indent="0" algn="l" rtl="0">
+              <a:spcBef>
+                <a:spcPts val="0"/>
+              </a:spcBef>
+              <a:spcAft>
+                <a:spcPts val="0"/>
+              </a:spcAft>
+              <a:buNone/>
+            </a:pPr>
+            <a:r>
+              <a:rPr lang="en-US"/>
+              <a:t>Why LASSO favors sparse solutions</a:t>
+            </a:r>
+            <a:endParaRPr/>
+          </a:p>
+        </p:txBody>
+      </p:sp>
+    </p:spTree>
+    <p:extLst>
+      <p:ext uri="{BB962C8B-B14F-4D97-AF65-F5344CB8AC3E}">
+        <p14:creationId xmlns:p14="http://schemas.microsoft.com/office/powerpoint/2010/main" val="4229551042"/>
       </p:ext>
     </p:extLst>
   </p:cSld>
